--- a/slides/07.pptx
+++ b/slides/07.pptx
@@ -182,6 +182,426 @@
 </inkml:ink>
 </file>
 
+<file path=ppt/ink/ink10.xml><?xml version="1.0" encoding="utf-8"?>
+<inkml:ink xmlns:inkml="http://www.w3.org/2003/InkML">
+  <inkml:definitions>
+    <inkml:context xml:id="ctx0">
+      <inkml:inkSource xml:id="inkSrc0">
+        <inkml:traceFormat>
+          <inkml:channel name="X" type="integer" min="-2.14748E9" max="2.14748E9" units="cm"/>
+          <inkml:channel name="Y" type="integer" min="-2.14748E9" max="2.14748E9" units="cm"/>
+          <inkml:channel name="F" type="integer" max="32767" units="dev"/>
+        </inkml:traceFormat>
+        <inkml:channelProperties>
+          <inkml:channelProperty channel="X" name="resolution" value="1000" units="1/cm"/>
+          <inkml:channelProperty channel="Y" name="resolution" value="1000" units="1/cm"/>
+          <inkml:channelProperty channel="F" name="resolution" value="0" units="1/dev"/>
+        </inkml:channelProperties>
+      </inkml:inkSource>
+      <inkml:timestamp xml:id="ts0" timeString="2026-05-19T06:49:41.413"/>
+    </inkml:context>
+    <inkml:brush xml:id="br0">
+      <inkml:brushProperty name="width" value="0.2" units="cm"/>
+      <inkml:brushProperty name="height" value="0.2" units="cm"/>
+      <inkml:brushProperty name="color" value="#E71224"/>
+    </inkml:brush>
+  </inkml:definitions>
+  <inkml:trace contextRef="#ctx0" brushRef="#br0">1 18 24575,'51'0'0,"1"0"0,23 0 0,-25 0 0,-29 0 0,-15 0 0,6 0 0,2-1 0,8 0 0,3 0 0,5 1 0,-8 0 0,2 0 0,-6 0 0,1 0 0,1 0 0,-1 0 0,5 0 0,1 0 0,2 0 0,1 0 0,-4 0 0,2 0 0,-3 0 0,-2 0 0,0-1 0,2 0 0,-1-1 0,2 2 0,-3-2 0,-4 1 0,2 0 0,-3 0 0,3 1 0,0-1 0,0 1 0,-1-3 0,-5 3 0,-2-1 0,-4 1 0,1 0 0,-2 0 0,-2 0 0</inkml:trace>
+</inkml:ink>
+</file>
+
+<file path=ppt/ink/ink11.xml><?xml version="1.0" encoding="utf-8"?>
+<inkml:ink xmlns:inkml="http://www.w3.org/2003/InkML">
+  <inkml:definitions>
+    <inkml:context xml:id="ctx0">
+      <inkml:inkSource xml:id="inkSrc0">
+        <inkml:traceFormat>
+          <inkml:channel name="X" type="integer" min="-2.14748E9" max="2.14748E9" units="cm"/>
+          <inkml:channel name="Y" type="integer" min="-2.14748E9" max="2.14748E9" units="cm"/>
+          <inkml:channel name="F" type="integer" max="32767" units="dev"/>
+        </inkml:traceFormat>
+        <inkml:channelProperties>
+          <inkml:channelProperty channel="X" name="resolution" value="1000" units="1/cm"/>
+          <inkml:channelProperty channel="Y" name="resolution" value="1000" units="1/cm"/>
+          <inkml:channelProperty channel="F" name="resolution" value="0" units="1/dev"/>
+        </inkml:channelProperties>
+      </inkml:inkSource>
+      <inkml:timestamp xml:id="ts0" timeString="2026-05-19T06:50:10.886"/>
+    </inkml:context>
+    <inkml:brush xml:id="br0">
+      <inkml:brushProperty name="width" value="0.2" units="cm"/>
+      <inkml:brushProperty name="height" value="0.2" units="cm"/>
+      <inkml:brushProperty name="color" value="#E71224"/>
+    </inkml:brush>
+  </inkml:definitions>
+  <inkml:trace contextRef="#ctx0" brushRef="#br0">1 36 24575,'27'-3'0,"7"-1"0,8 0 0,5-1 0,-4 1 0,-2-1 0,-4 2 0,-1 0 0,-7 0 0,-4 2 0,-4 1 0,2 0 0,8 0 0,4 0 0,2 0 0,0 0 0,-2 0 0,-7 0 0,-4 0 0,-10 0 0,-1 0 0,-1 0 0,1 0 0,9 0 0,13 2 0,8 0 0,6 0 0,-1 0 0,-6-1 0,-3 0 0,-13 1 0,-11-2 0,-10 1 0,-5-1 0</inkml:trace>
+</inkml:ink>
+</file>
+
+<file path=ppt/ink/ink12.xml><?xml version="1.0" encoding="utf-8"?>
+<inkml:ink xmlns:inkml="http://www.w3.org/2003/InkML">
+  <inkml:definitions>
+    <inkml:context xml:id="ctx0">
+      <inkml:inkSource xml:id="inkSrc0">
+        <inkml:traceFormat>
+          <inkml:channel name="X" type="integer" min="-2.14748E9" max="2.14748E9" units="cm"/>
+          <inkml:channel name="Y" type="integer" min="-2.14748E9" max="2.14748E9" units="cm"/>
+          <inkml:channel name="F" type="integer" max="32767" units="dev"/>
+        </inkml:traceFormat>
+        <inkml:channelProperties>
+          <inkml:channelProperty channel="X" name="resolution" value="1000" units="1/cm"/>
+          <inkml:channelProperty channel="Y" name="resolution" value="1000" units="1/cm"/>
+          <inkml:channelProperty channel="F" name="resolution" value="0" units="1/dev"/>
+        </inkml:channelProperties>
+      </inkml:inkSource>
+      <inkml:timestamp xml:id="ts0" timeString="2026-05-19T06:52:26.675"/>
+    </inkml:context>
+    <inkml:brush xml:id="br0">
+      <inkml:brushProperty name="width" value="0.2" units="cm"/>
+      <inkml:brushProperty name="height" value="0.2" units="cm"/>
+      <inkml:brushProperty name="color" value="#E71224"/>
+    </inkml:brush>
+  </inkml:definitions>
+  <inkml:trace contextRef="#ctx0" brushRef="#br0">669 906 24575,'-52'-2'0,"5"-1"0,-16-8 0,8-3 0,-1-2 0,10 1 0,4 2 0,5 1 0,-3-2 0,5-1 0,-3-2 0,7 2 0,-1-4 0,7 3 0,6 2 0,6 2 0,4 2 0,3-3 0,3 1 0,-2-9 0,2-2 0,-2-9 0,1-1 0,3-3 0,0 1 0,2-1 0,1-2 0,3 2 0,1 2 0,7-2 0,5 1 0,9-2 0,9-1 0,1 6 0,3-2 0,0 6 0,-5 5 0,4 3 0,-6 5 0,6 2 0,-2 3 0,1 3 0,2 4 0,-4 0 0,-2 1 0,0 1 0,-7 0 0,-2 1 0,-1 0 0,1 0 0,10 1 0,4 1 0,-7 1 0,0 2 0,-8-2 0,3 0 0,2 0 0,-2 0 0,1 3 0,-4 0 0,2 2 0,-9 2 0,2 5 0,-5 0 0,5 8 0,-1-2 0,-3 5 0,-4 3 0,-3 7 0,-3 0 0,-3 1 0,-1-2 0,-3-1 0,-3 4 0,-2-4 0,-5 4 0,3-9 0,-4 0 0,2-9 0,-1 0 0,-1-3 0,-2 1 0,0-3 0,-1-3 0,5-3 0,3-4 0,3-1 0,2-1 0,-2 1 0,-7 5 0,-5 1 0,-5 3 0,-6-2 0,-3 2 0,5-6 0,0 2 0,5-3 0,-2 2 0,-8 2 0,1 1 0,0 0 0,7-2 0,1-3 0,0 1 0,-2-1 0,3-1 0,3-1 0,4-2 0,6-1 0,0 0 0,5 0 0,-1 1 0</inkml:trace>
+</inkml:ink>
+</file>
+
+<file path=ppt/ink/ink13.xml><?xml version="1.0" encoding="utf-8"?>
+<inkml:ink xmlns:inkml="http://www.w3.org/2003/InkML">
+  <inkml:definitions>
+    <inkml:context xml:id="ctx0">
+      <inkml:inkSource xml:id="inkSrc0">
+        <inkml:traceFormat>
+          <inkml:channel name="X" type="integer" min="-2.14748E9" max="2.14748E9" units="cm"/>
+          <inkml:channel name="Y" type="integer" min="-2.14748E9" max="2.14748E9" units="cm"/>
+          <inkml:channel name="F" type="integer" max="32767" units="dev"/>
+        </inkml:traceFormat>
+        <inkml:channelProperties>
+          <inkml:channelProperty channel="X" name="resolution" value="1000" units="1/cm"/>
+          <inkml:channelProperty channel="Y" name="resolution" value="1000" units="1/cm"/>
+          <inkml:channelProperty channel="F" name="resolution" value="0" units="1/dev"/>
+        </inkml:channelProperties>
+      </inkml:inkSource>
+      <inkml:timestamp xml:id="ts0" timeString="2026-05-19T06:52:38.684"/>
+    </inkml:context>
+    <inkml:brush xml:id="br0">
+      <inkml:brushProperty name="width" value="0.2" units="cm"/>
+      <inkml:brushProperty name="height" value="0.2" units="cm"/>
+      <inkml:brushProperty name="color" value="#E71224"/>
+    </inkml:brush>
+  </inkml:definitions>
+  <inkml:trace contextRef="#ctx0" brushRef="#br0">461 754 24575,'-58'-21'0,"-3"-1"0,-5-2 0,8 2 0,15 4 0,11 2 0,12 2 0,0-6 0,1-1 0,-1-8 0,4-1 0,1-6 0,3 2 0,5 7 0,1 0 0,2 8 0,2-4 0,1 0 0,1-7 0,0 4 0,0-13 0,3 12 0,7-11 0,7 8 0,8-3 0,-3 10 0,4 3 0,-2 7 0,10 0 0,4 2 0,5 4 0,8-1 0,1 4 0,-2 0 0,-3 3 0,-9 1 0,-3 0 0,3 0 0,3 2 0,9 2 0,2 2 0,8 1 0,0-1 0,-3-1 0,-15-1 0,-7-1 0,-18 1 0,1 5 0,-1 6 0,1 11 0,9 18 0,-1 9 0,4 10 0,-8-7 0,-8-3 0,-9-10 0,-3-8 0,-9-3 0,-6-2 0,-7-2 0,-10 5 0,-5-4 0,-13 3 0,4-5 0,-2-4 0,16-11 0,10-6 0,9-4 0,1-1 0,-4-1 0,-5 0 0,-7 0 0,4 0 0,8 0 0,8 0 0</inkml:trace>
+</inkml:ink>
+</file>
+
+<file path=ppt/ink/ink14.xml><?xml version="1.0" encoding="utf-8"?>
+<inkml:ink xmlns:inkml="http://www.w3.org/2003/InkML">
+  <inkml:definitions>
+    <inkml:context xml:id="ctx0">
+      <inkml:inkSource xml:id="inkSrc0">
+        <inkml:traceFormat>
+          <inkml:channel name="X" type="integer" min="-2.14748E9" max="2.14748E9" units="cm"/>
+          <inkml:channel name="Y" type="integer" min="-2.14748E9" max="2.14748E9" units="cm"/>
+          <inkml:channel name="F" type="integer" max="32767" units="dev"/>
+        </inkml:traceFormat>
+        <inkml:channelProperties>
+          <inkml:channelProperty channel="X" name="resolution" value="1000" units="1/cm"/>
+          <inkml:channelProperty channel="Y" name="resolution" value="1000" units="1/cm"/>
+          <inkml:channelProperty channel="F" name="resolution" value="0" units="1/dev"/>
+        </inkml:channelProperties>
+      </inkml:inkSource>
+      <inkml:timestamp xml:id="ts0" timeString="2026-05-19T06:52:39.885"/>
+    </inkml:context>
+    <inkml:brush xml:id="br0">
+      <inkml:brushProperty name="width" value="0.2" units="cm"/>
+      <inkml:brushProperty name="height" value="0.2" units="cm"/>
+      <inkml:brushProperty name="color" value="#E71224"/>
+    </inkml:brush>
+  </inkml:definitions>
+  <inkml:trace contextRef="#ctx0" brushRef="#br0">372 1 24575,'-56'15'0,"7"-1"0,1 1 0,2 3 0,7-2 0,-4 3 0,8-2 0,9-3 0,6-4 0,12-6 0,7-2 0,1 8 0,7 8 0,15 22 0,10 9 0,10 5 0,-6-11 0,-14-18 0,-11-12 0,-2-2 0,-3-1 0,2 0 0,-4-3 0</inkml:trace>
+</inkml:ink>
+</file>
+
+<file path=ppt/ink/ink15.xml><?xml version="1.0" encoding="utf-8"?>
+<inkml:ink xmlns:inkml="http://www.w3.org/2003/InkML">
+  <inkml:definitions>
+    <inkml:context xml:id="ctx0">
+      <inkml:inkSource xml:id="inkSrc0">
+        <inkml:traceFormat>
+          <inkml:channel name="X" type="integer" min="-2.14748E9" max="2.14748E9" units="cm"/>
+          <inkml:channel name="Y" type="integer" min="-2.14748E9" max="2.14748E9" units="cm"/>
+          <inkml:channel name="F" type="integer" max="32767" units="dev"/>
+        </inkml:traceFormat>
+        <inkml:channelProperties>
+          <inkml:channelProperty channel="X" name="resolution" value="1000" units="1/cm"/>
+          <inkml:channelProperty channel="Y" name="resolution" value="1000" units="1/cm"/>
+          <inkml:channelProperty channel="F" name="resolution" value="0" units="1/dev"/>
+        </inkml:channelProperties>
+      </inkml:inkSource>
+      <inkml:timestamp xml:id="ts0" timeString="2026-05-19T06:52:41.412"/>
+    </inkml:context>
+    <inkml:brush xml:id="br0">
+      <inkml:brushProperty name="width" value="0.2" units="cm"/>
+      <inkml:brushProperty name="height" value="0.2" units="cm"/>
+      <inkml:brushProperty name="color" value="#E71224"/>
+    </inkml:brush>
+  </inkml:definitions>
+  <inkml:trace contextRef="#ctx0" brushRef="#br0">1 153 24575,'72'-5'0,"15"-1"0,-24 2 0,3 0 0,-5-1 0,0-1 0,5-1 0,-2 1 0,30-6 0,-1 5 0,-13-1 0,9-1 0,-11 3 0,15-4 0,-8 4 0,-34 3 0,1 0 0,1 1 0,-2 0 0,39-3 0,8 2 0,-18-5 0,1 4 0,-16-3 0,-4 2 0,-5 2 0,4-1 0,6 3 0,-1-1 0,5 2 0,0 0 0,0 0 0,0 0 0,-3 2 0,-5 0 0,-7 3 0,-16-3 0,-10 1 0,-13-3 0,3 0 0,8 0 0,5 1 0,8-1 0,-4 4 0,-2-3 0,11 3 0,-13-2 0,-2 0 0,-17-2 0,-9 0 0</inkml:trace>
+</inkml:ink>
+</file>
+
+<file path=ppt/ink/ink16.xml><?xml version="1.0" encoding="utf-8"?>
+<inkml:ink xmlns:inkml="http://www.w3.org/2003/InkML">
+  <inkml:definitions>
+    <inkml:context xml:id="ctx0">
+      <inkml:inkSource xml:id="inkSrc0">
+        <inkml:traceFormat>
+          <inkml:channel name="X" type="integer" min="-2.14748E9" max="2.14748E9" units="cm"/>
+          <inkml:channel name="Y" type="integer" min="-2.14748E9" max="2.14748E9" units="cm"/>
+          <inkml:channel name="F" type="integer" max="32767" units="dev"/>
+        </inkml:traceFormat>
+        <inkml:channelProperties>
+          <inkml:channelProperty channel="X" name="resolution" value="1000" units="1/cm"/>
+          <inkml:channelProperty channel="Y" name="resolution" value="1000" units="1/cm"/>
+          <inkml:channelProperty channel="F" name="resolution" value="0" units="1/dev"/>
+        </inkml:channelProperties>
+      </inkml:inkSource>
+      <inkml:timestamp xml:id="ts0" timeString="2026-05-19T06:53:06.138"/>
+    </inkml:context>
+    <inkml:brush xml:id="br0">
+      <inkml:brushProperty name="width" value="0.2" units="cm"/>
+      <inkml:brushProperty name="height" value="0.2" units="cm"/>
+      <inkml:brushProperty name="color" value="#E71224"/>
+    </inkml:brush>
+  </inkml:definitions>
+  <inkml:trace contextRef="#ctx0" brushRef="#br0">0 23 24575,'62'-4'0,"-1"0"0,6 1 0,-1 1 0,-1 1 0,0 0 0,-2 1 0,0 0 0,-5 0 0,-2 0 0,42 0 0,-2-2 0,-11 2 0,1-2 0,-11 2 0,6 0 0,-4 0 0,9 0 0,-12 0 0,8 0 0,-8 0 0,12 0 0,-14-1 0,2 0 0,-1 0 0,-4 1 0,8 0 0,-3 0 0,3 1 0,8 4 0,-5-2 0,-9 1 0,-18-2 0,-15 0 0,-15-2 0,-6 1 0,-9-1 0,-1 0 0,40 0 0,4 0 0,20 0 0,-23 0 0,-29 0 0,12 0 0,-12 0 0,18 0 0,-25 0 0,-5 0 0</inkml:trace>
+</inkml:ink>
+</file>
+
+<file path=ppt/ink/ink2.xml><?xml version="1.0" encoding="utf-8"?>
+<inkml:ink xmlns:inkml="http://www.w3.org/2003/InkML">
+  <inkml:definitions>
+    <inkml:context xml:id="ctx0">
+      <inkml:inkSource xml:id="inkSrc0">
+        <inkml:traceFormat>
+          <inkml:channel name="X" type="integer" min="-2.14748E9" max="2.14748E9" units="cm"/>
+          <inkml:channel name="Y" type="integer" min="-2.14748E9" max="2.14748E9" units="cm"/>
+          <inkml:channel name="F" type="integer" max="32767" units="dev"/>
+        </inkml:traceFormat>
+        <inkml:channelProperties>
+          <inkml:channelProperty channel="X" name="resolution" value="1000" units="1/cm"/>
+          <inkml:channelProperty channel="Y" name="resolution" value="1000" units="1/cm"/>
+          <inkml:channelProperty channel="F" name="resolution" value="0" units="1/dev"/>
+        </inkml:channelProperties>
+      </inkml:inkSource>
+      <inkml:timestamp xml:id="ts0" timeString="2026-05-19T06:38:30.206"/>
+    </inkml:context>
+    <inkml:brush xml:id="br0">
+      <inkml:brushProperty name="width" value="0.2" units="cm"/>
+      <inkml:brushProperty name="height" value="0.2" units="cm"/>
+      <inkml:brushProperty name="color" value="#E71224"/>
+    </inkml:brush>
+  </inkml:definitions>
+  <inkml:trace contextRef="#ctx0" brushRef="#br0">476 0 24575,'-2'86'0,"2"-30"0,-2 36 0,2-48 0,0 1 0,0-4 0,1 2 0,0 6 0,1-10 0,2 16 0,1-7 0,2 12 0,-1-7 0,1-4 0,-1-2 0,3-3 0,1-1 0,1-3 0,3 0 0,2-3 0,6 10 0,2-7 0,6 7 0,-4-8 0,5 3 0,-2-7 0,1-1 0,4-3 0,0-3 0,4 0 0,1-3 0,2-3 0,3 0 0,0-7 0,2-3 0,6-4 0,1-4 0,12-2 0,-1-1 0,-2 1 0,2-2 0,-13 1 0,7-2 0,-8-3 0,-2-2 0,-1-9 0,2-4 0,-1-9 0,2-7 0,-10-1 0,4-13 0,-6 2 0,6-16 0,-13 9 0,-1-15 0,-10 2 0,-1-11 0,-3-3 0,-4 0 0,-5 10 0,-2 7 0,-4 14 0,0 2 0,-2-2 0,0 2 0,-4-4 0,-2 9 0,-5 2 0,-1 12 0,-1 4 0,2 10 0,-6-1 0,-4 0 0,-6 0 0,-2 0 0,4 8 0,4 1 0,-1 2 0,8 3 0,-4-1 0,4 1 0,-5 2 0,-4 1 0,-3 5 0,-3 2 0,5 1 0,-2 4 0,4 3 0,-1 1 0,-3 9 0,6-2 0,-4 8 0,4 5 0,0 9 0,0 3 0,3 2 0,3-4 0,1 6 0,0 1 0,2 6 0,2-5 0,0 3 0,3-1 0,-1 2 0,2 9 0,-2-5 0,1 15 0,-2-4 0,0 10 0,-4-6 0,1-5 0,-3-8 0,-4 0 0,-3 2 0,-6 5 0,-2 5 0,-1-14 0,-1 6 0,1-15 0,1 2 0,1-10 0,0-3 0,-3 0 0,-10 7 0,-5 2 0,-4 0 0,5-11 0,-1-7 0,11-12 0,-10-3 0,5-8 0,-7-2 0,-5-3 0,-6-1 0,-2-1 0,-5 0 0,13-2 0,2-1 0,16-6 0,0-11 0,0-18 0,0-12 0,-10-22 0,10 10 0,1 0 0,15 29 0,9 13 0,8 14 0,2 2 0</inkml:trace>
+</inkml:ink>
+</file>
+
+<file path=ppt/ink/ink3.xml><?xml version="1.0" encoding="utf-8"?>
+<inkml:ink xmlns:inkml="http://www.w3.org/2003/InkML">
+  <inkml:definitions>
+    <inkml:context xml:id="ctx0">
+      <inkml:inkSource xml:id="inkSrc0">
+        <inkml:traceFormat>
+          <inkml:channel name="X" type="integer" min="-2.14748E9" max="2.14748E9" units="cm"/>
+          <inkml:channel name="Y" type="integer" min="-2.14748E9" max="2.14748E9" units="cm"/>
+          <inkml:channel name="F" type="integer" max="32767" units="dev"/>
+        </inkml:traceFormat>
+        <inkml:channelProperties>
+          <inkml:channelProperty channel="X" name="resolution" value="1000" units="1/cm"/>
+          <inkml:channelProperty channel="Y" name="resolution" value="1000" units="1/cm"/>
+          <inkml:channelProperty channel="F" name="resolution" value="0" units="1/dev"/>
+        </inkml:channelProperties>
+      </inkml:inkSource>
+      <inkml:timestamp xml:id="ts0" timeString="2026-05-19T06:38:40.353"/>
+    </inkml:context>
+    <inkml:brush xml:id="br0">
+      <inkml:brushProperty name="width" value="0.2" units="cm"/>
+      <inkml:brushProperty name="height" value="0.2" units="cm"/>
+      <inkml:brushProperty name="color" value="#E71224"/>
+    </inkml:brush>
+  </inkml:definitions>
+  <inkml:trace contextRef="#ctx0" brushRef="#br0">685 101 24575,'-3'66'0,"1"7"0,5-6 0,1 6 0,5 4 0,-1-13 0,3 5 0,1-3 0,2-8 0,2 6 0,0-7 0,4 1 0,1-2 0,0-12 0,1-5 0,2-4 0,6-3 0,11 3 0,7-9 0,17-1 0,8-8 0,18-3 0,-4-5 0,1-4 0,-25-1 0,-4-7 0,-13-8 0,19-13 0,0-7 0,7-9 0,-10-1 0,-14 3 0,-14 1 0,-9 7 0,-5 6 0,-4 1 0,1 4 0,-3-2 0,3-1 0,2-8 0,4-6 0,-1-7 0,-3 1 0,-3 0 0,-5 3 0,-3-7 0,-2-4 0,-1-14 0,-2-5 0,-1-1 0,-7 2 0,-6 7 0,-6 14 0,-5 3 0,1 20 0,-10-3 0,1 10 0,-19-3 0,6 7 0,-4 2 0,15 7 0,11 1 0,0 6 0,-2 7 0,-9 12 0,-6 21 0,-2 15 0,4 16 0,7 6 0,9 4 0,5 4 0,9-37 0,0 2 0,1 0 0,2 0 0,-2 2 0,1 1 0,1 1 0,0-1 0,0 36 0,0-39 0,1-1 0,-3 39 0,3-41 0,-1 1 0,-2 42 0,0-11 0,1 1 0,-4-4 0,1 4 0,-2-10 0,0-14 0,-5-6 0,-5-10 0,-17 13 0,-11-1 0,-8-1 0,-15 7 0,0-11 0,-2-2 0,0-14 0,6-12 0,-12-11 0,29-7 0,-2-2 0,-9-1 0,-3 0 0,-6-1 0,0 0 0,-1-2 0,3-1 0,12 0 0,4-2 0,-37-11 0,33-6 0,12-11 0,10-20 0,9-15 0,8 2 0,6 6 0,6 33 0,2 12 0</inkml:trace>
+</inkml:ink>
+</file>
+
+<file path=ppt/ink/ink4.xml><?xml version="1.0" encoding="utf-8"?>
+<inkml:ink xmlns:inkml="http://www.w3.org/2003/InkML">
+  <inkml:definitions>
+    <inkml:context xml:id="ctx0">
+      <inkml:inkSource xml:id="inkSrc0">
+        <inkml:traceFormat>
+          <inkml:channel name="X" type="integer" min="-2.14748E9" max="2.14748E9" units="cm"/>
+          <inkml:channel name="Y" type="integer" min="-2.14748E9" max="2.14748E9" units="cm"/>
+          <inkml:channel name="F" type="integer" max="32767" units="dev"/>
+        </inkml:traceFormat>
+        <inkml:channelProperties>
+          <inkml:channelProperty channel="X" name="resolution" value="1000" units="1/cm"/>
+          <inkml:channelProperty channel="Y" name="resolution" value="1000" units="1/cm"/>
+          <inkml:channelProperty channel="F" name="resolution" value="0" units="1/dev"/>
+        </inkml:channelProperties>
+      </inkml:inkSource>
+      <inkml:timestamp xml:id="ts0" timeString="2026-05-19T06:44:31.981"/>
+    </inkml:context>
+    <inkml:brush xml:id="br0">
+      <inkml:brushProperty name="width" value="0.2" units="cm"/>
+      <inkml:brushProperty name="height" value="0.2" units="cm"/>
+      <inkml:brushProperty name="color" value="#E71224"/>
+    </inkml:brush>
+  </inkml:definitions>
+  <inkml:trace contextRef="#ctx0" brushRef="#br0">1 1 24575,'48'0'0,"6"0"0,18 1 0,4 2 0,8 3 0,-7 1 0,-8-1 0,-10-3 0,-13-2 0,-4-1 0,4 0 0,2 0 0,12 0 0,-2-2 0,-15 1 0,-10 0 0,-22 0 0,-2 0 0,-4 0 0,2 0 0,-1 1 0,7-2 0,-2 1 0,6-1 0,-9 2 0,-4 0 0</inkml:trace>
+</inkml:ink>
+</file>
+
+<file path=ppt/ink/ink5.xml><?xml version="1.0" encoding="utf-8"?>
+<inkml:ink xmlns:inkml="http://www.w3.org/2003/InkML">
+  <inkml:definitions>
+    <inkml:context xml:id="ctx0">
+      <inkml:inkSource xml:id="inkSrc0">
+        <inkml:traceFormat>
+          <inkml:channel name="X" type="integer" min="-2.14748E9" max="2.14748E9" units="cm"/>
+          <inkml:channel name="Y" type="integer" min="-2.14748E9" max="2.14748E9" units="cm"/>
+          <inkml:channel name="F" type="integer" max="32767" units="dev"/>
+        </inkml:traceFormat>
+        <inkml:channelProperties>
+          <inkml:channelProperty channel="X" name="resolution" value="1000" units="1/cm"/>
+          <inkml:channelProperty channel="Y" name="resolution" value="1000" units="1/cm"/>
+          <inkml:channelProperty channel="F" name="resolution" value="0" units="1/dev"/>
+        </inkml:channelProperties>
+      </inkml:inkSource>
+      <inkml:timestamp xml:id="ts0" timeString="2026-05-19T06:44:35.165"/>
+    </inkml:context>
+    <inkml:brush xml:id="br0">
+      <inkml:brushProperty name="width" value="0.2" units="cm"/>
+      <inkml:brushProperty name="height" value="0.2" units="cm"/>
+      <inkml:brushProperty name="color" value="#E71224"/>
+    </inkml:brush>
+  </inkml:definitions>
+  <inkml:trace contextRef="#ctx0" brushRef="#br0">1 63 24575,'30'0'0,"11"0"0,34 1 0,23 3 0,-34-2 0,2 1 0,8-1 0,0 0 0,-7 0 0,1-1 0,8-1 0,-1 0 0,-9 0 0,-1 0 0,6-1 0,0 0 0,1 0 0,-1 0 0,-4-2 0,0 1 0,-2 0 0,-1 1 0,-2 0 0,0 0 0,-5 1 0,0 1 0,-6 0 0,-2 0 0,50 2 0,-27-3 0,14 0 0,-19 0 0,9 0 0,-10-1 0,-1 0 0,-5-1 0,5 2 0,-7 0 0,14-1 0,-2-1 0,8-3 0,3 0 0,8-2 0,5 1 0,-42 2 0,1 1 0,45 0 0,-3-1 0,-4 4 0,3-4 0,-44 2 0,1 1 0,1-2 0,-1 0 0,37-1 0,-6 0 0,-10 2 0,6 0 0,-2 2 0,4 0 0,-11 0 0,-1 0 0,-9 0 0,2 0 0,-2 0 0,-6-1 0,-14 1 0,-18-2 0,-13 2 0,-8 0 0</inkml:trace>
+</inkml:ink>
+</file>
+
+<file path=ppt/ink/ink6.xml><?xml version="1.0" encoding="utf-8"?>
+<inkml:ink xmlns:inkml="http://www.w3.org/2003/InkML">
+  <inkml:definitions>
+    <inkml:context xml:id="ctx0">
+      <inkml:inkSource xml:id="inkSrc0">
+        <inkml:traceFormat>
+          <inkml:channel name="X" type="integer" min="-2.14748E9" max="2.14748E9" units="cm"/>
+          <inkml:channel name="Y" type="integer" min="-2.14748E9" max="2.14748E9" units="cm"/>
+          <inkml:channel name="F" type="integer" max="32767" units="dev"/>
+        </inkml:traceFormat>
+        <inkml:channelProperties>
+          <inkml:channelProperty channel="X" name="resolution" value="1000" units="1/cm"/>
+          <inkml:channelProperty channel="Y" name="resolution" value="1000" units="1/cm"/>
+          <inkml:channelProperty channel="F" name="resolution" value="0" units="1/dev"/>
+        </inkml:channelProperties>
+      </inkml:inkSource>
+      <inkml:timestamp xml:id="ts0" timeString="2026-05-19T06:46:26.070"/>
+    </inkml:context>
+    <inkml:brush xml:id="br0">
+      <inkml:brushProperty name="width" value="0.2" units="cm"/>
+      <inkml:brushProperty name="height" value="0.2" units="cm"/>
+      <inkml:brushProperty name="color" value="#E71224"/>
+    </inkml:brush>
+  </inkml:definitions>
+  <inkml:trace contextRef="#ctx0" brushRef="#br0">0 66 24575,'84'-5'0,"14"0"0,-39 4 0,3 0 0,3 0 0,1 0 0,-4 2 0,-1-1 0,2 1 0,-1-1 0,-5 2 0,-2-1 0,41 1 0,-40-1 0,-1 0 0,44 0 0,-35 0 0,1-1 0,0 0 0,0-1 0,3 0 0,-1-1 0,0 0 0,-2-1 0,-2 1 0,-1-1 0,-5 1 0,-1 0 0,-2-1 0,0 1 0,45-1 0,-44 0 0,-1-1 0,44-3 0,-4-2 0,-27 2 0,-17 3 0,-22 3 0,-6 0 0,-2 1 0,0 0 0,1 0 0,-2 0 0,-1 0 0,-8 0 0,-1 0 0,-7 0 0,1 0 0</inkml:trace>
+</inkml:ink>
+</file>
+
+<file path=ppt/ink/ink7.xml><?xml version="1.0" encoding="utf-8"?>
+<inkml:ink xmlns:inkml="http://www.w3.org/2003/InkML">
+  <inkml:definitions>
+    <inkml:context xml:id="ctx0">
+      <inkml:inkSource xml:id="inkSrc0">
+        <inkml:traceFormat>
+          <inkml:channel name="X" type="integer" min="-2.14748E9" max="2.14748E9" units="cm"/>
+          <inkml:channel name="Y" type="integer" min="-2.14748E9" max="2.14748E9" units="cm"/>
+          <inkml:channel name="F" type="integer" max="32767" units="dev"/>
+        </inkml:traceFormat>
+        <inkml:channelProperties>
+          <inkml:channelProperty channel="X" name="resolution" value="1000" units="1/cm"/>
+          <inkml:channelProperty channel="Y" name="resolution" value="1000" units="1/cm"/>
+          <inkml:channelProperty channel="F" name="resolution" value="0" units="1/dev"/>
+        </inkml:channelProperties>
+      </inkml:inkSource>
+      <inkml:timestamp xml:id="ts0" timeString="2026-05-19T06:46:33.146"/>
+    </inkml:context>
+    <inkml:brush xml:id="br0">
+      <inkml:brushProperty name="width" value="0.2" units="cm"/>
+      <inkml:brushProperty name="height" value="0.2" units="cm"/>
+      <inkml:brushProperty name="color" value="#E71224"/>
+    </inkml:brush>
+  </inkml:definitions>
+  <inkml:trace contextRef="#ctx0" brushRef="#br0">1 0 24575,'62'2'0,"3"1"0,-4 0 0,-1 3 0,-4-1 0,-7 0 0,6-4 0,5 3 0,19-4 0,14 2 0,-9-1 0,7 0 0,-28 0 0,3-1 0,-6 0 0,8 0 0,9 0 0,-21-2 0,3 0 0,4-1 0,3 1 0,12-2 0,4 1 0,3 0 0,2 1 0,-1 1 0,1 0 0,7 1 0,0 0 0,-6 0 0,-3 0 0,-5 1 0,-3-1 0,-11 1 0,-5-1 0,26 1 0,-14 0 0,-18-1 0,-4 0 0,-13 0 0,-10 0 0,-16 0 0,-4 0 0,-4 1 0,4 0 0,3 0 0,15-1 0,16-2 0,17 0 0,24 0 0,5 0 0,-31 1 0,0 0 0,-5 0 0,0 1 0,45-2 0,-20 0 0,-25 2 0,-5-1 0,-6 1 0,-2 0 0,-4 1 0,-4 0 0,-5 1 0,-8-1 0,-9 0 0,-4-1 0,-4 0 0</inkml:trace>
+</inkml:ink>
+</file>
+
+<file path=ppt/ink/ink8.xml><?xml version="1.0" encoding="utf-8"?>
+<inkml:ink xmlns:inkml="http://www.w3.org/2003/InkML">
+  <inkml:definitions>
+    <inkml:context xml:id="ctx0">
+      <inkml:inkSource xml:id="inkSrc0">
+        <inkml:traceFormat>
+          <inkml:channel name="X" type="integer" min="-2.14748E9" max="2.14748E9" units="cm"/>
+          <inkml:channel name="Y" type="integer" min="-2.14748E9" max="2.14748E9" units="cm"/>
+          <inkml:channel name="F" type="integer" max="32767" units="dev"/>
+        </inkml:traceFormat>
+        <inkml:channelProperties>
+          <inkml:channelProperty channel="X" name="resolution" value="1000" units="1/cm"/>
+          <inkml:channelProperty channel="Y" name="resolution" value="1000" units="1/cm"/>
+          <inkml:channelProperty channel="F" name="resolution" value="0" units="1/dev"/>
+        </inkml:channelProperties>
+      </inkml:inkSource>
+      <inkml:timestamp xml:id="ts0" timeString="2026-05-19T06:48:16.877"/>
+    </inkml:context>
+    <inkml:brush xml:id="br0">
+      <inkml:brushProperty name="width" value="0.2" units="cm"/>
+      <inkml:brushProperty name="height" value="0.2" units="cm"/>
+      <inkml:brushProperty name="color" value="#E71224"/>
+    </inkml:brush>
+  </inkml:definitions>
+  <inkml:trace contextRef="#ctx0" brushRef="#br0">0 15 24575,'75'-3'0,"11"2"0,6 0 0,-39 1 0,0 0 0,-3 0 0,0 0 0,2 0 0,1 0 0,3 1 0,0 0 0,43 0 0,-47 0 0,0 1 0,41-1 0,2 2 0,-10 0 0,8 0 0,-13-1 0,1-1 0,-10-1 0,-12 0 0,12 0 0,-7 1 0,15 0 0,-6 0 0,3 1 0,14 2 0,-36 0 0,3 0 0,4 0 0,1 1 0,5 0 0,0-1 0,-1 0 0,1 0 0,-1-1 0,1 0 0,1 0 0,2 0 0,4 0 0,0 0 0,-5 0 0,0 0 0,6 2 0,0 0 0,-9 0 0,1 0 0,6 2 0,0-1 0,-1 0 0,-2-1 0,-6 0 0,0-1 0,6-1 0,0-1 0,-9 0 0,0 1 0,5-2 0,1 0 0,-2 1 0,-2-1 0,-3 0 0,0-1 0,3 1 0,0 0 0,-3-1 0,-1 1 0,6-1 0,-1 1 0,-6-1 0,-1 1 0,9 0 0,1-1 0,-2-1 0,1 1 0,5-1 0,2 1 0,1-2 0,-1 0 0,-7 2 0,0-1 0,14-2 0,1 1 0,-6 1 0,1 0 0,12-2 0,2 0 0,-9 1 0,-3-1 0,-10 1 0,-3-1 0,-6 1 0,-2 0 0,38-2 0,0 2 0,4 0 0,-46 2 0,3 0 0,6 1 0,1 0 0,4-1 0,1 1 0,3 0 0,1-1 0,-4-1 0,-1-1 0,2 1 0,0-1 0,-4-1 0,1 1 0,3 0 0,0 1 0,-1-1 0,1 0 0,-1 0 0,2 0 0,8 0 0,2-1 0,-5-1 0,1 0 0,12 2 0,1 1 0,-4-1 0,-1 1 0,-1 1 0,1 0 0,8 0 0,0 0 0,-7-1 0,1-1 0,3 1 0,-1-2 0,-10 0 0,-2-2 0,-5 2 0,-3 0 0,-4-3 0,-2 1 0,-1 1 0,-2 1 0,-3-2 0,-2 0 0,4 2 0,-2 1 0,38-4 0,-42 3 0,0 0 0,38 0 0,-37 1 0,2 0 0,-3 1 0,2 1 0,7-2 0,1 1 0,2-1 0,1 0 0,1 1 0,1-1 0,4 0 0,0 1 0,-6 0 0,-1 0 0,5 1 0,0 0 0,-4 0 0,0 0 0,5 0 0,1 0 0,1 0 0,0 0 0,-3 0 0,0 0 0,10-2 0,2 1 0,3 3 0,1 0 0,10-1 0,0 0 0,-2 4 0,-4 0 0,-12-2 0,-3 1 0,-4-1 0,-3 0 0,32 0 0,-45-2 0,0 0 0,37 2 0,6 0 0,-39-1 0,2 0 0,2 2 0,1 0 0,2-1 0,-2 0 0,-11 0 0,-3 1 0,23-1 0,-34-2 0,-10-1 0,-3 0 0,3 0 0,18 0 0,3 0 0,16-3 0,5 0 0,3-3 0,13 2 0,-4 1 0,6 1 0,-9 1 0,-3-3 0,-10 3 0,-5-1 0,-12 1 0,-11-1 0,-1 0 0,-3-1 0,0 1 0,-11 0 0,-5 0 0,-11 1 0,0 0 0,-4 1 0,3 0 0,2-1 0,0 0 0,0 1 0,-4-1 0,-3 1 0</inkml:trace>
+</inkml:ink>
+</file>
+
+<file path=ppt/ink/ink9.xml><?xml version="1.0" encoding="utf-8"?>
+<inkml:ink xmlns:inkml="http://www.w3.org/2003/InkML">
+  <inkml:definitions>
+    <inkml:context xml:id="ctx0">
+      <inkml:inkSource xml:id="inkSrc0">
+        <inkml:traceFormat>
+          <inkml:channel name="X" type="integer" min="-2.14748E9" max="2.14748E9" units="cm"/>
+          <inkml:channel name="Y" type="integer" min="-2.14748E9" max="2.14748E9" units="cm"/>
+          <inkml:channel name="F" type="integer" max="32767" units="dev"/>
+        </inkml:traceFormat>
+        <inkml:channelProperties>
+          <inkml:channelProperty channel="X" name="resolution" value="1000" units="1/cm"/>
+          <inkml:channelProperty channel="Y" name="resolution" value="1000" units="1/cm"/>
+          <inkml:channelProperty channel="F" name="resolution" value="0" units="1/dev"/>
+        </inkml:channelProperties>
+      </inkml:inkSource>
+      <inkml:timestamp xml:id="ts0" timeString="2026-05-19T06:49:27.486"/>
+    </inkml:context>
+    <inkml:brush xml:id="br0">
+      <inkml:brushProperty name="width" value="0.2" units="cm"/>
+      <inkml:brushProperty name="height" value="0.2" units="cm"/>
+      <inkml:brushProperty name="color" value="#E71224"/>
+    </inkml:brush>
+  </inkml:definitions>
+  <inkml:trace contextRef="#ctx0" brushRef="#br0">1 77 24575,'71'-1'0,"0"-1"0,18-2 0,10 1 0,-5 1 0,7 1 0,2-1-820,-23 0 1,0 1 0,2-1 0,2 0 163,-5 1 1,3 0-1,2 1 1,-2-1 0,-2 0 515,7 0 0,-1 0 1,-2 0-1,1 0 530,2 1 1,0 0 0,-1-1 0,-2 1-391,14-1 0,-2 0 0,-4 1 0,-10 0 0,-2 1 0,1-1 0,9 1 0,2-2 0,-2 2 0,-15 0 0,-3 1 0,2-1 0,12 1 0,2 0 0,-3 0 0,-10 0 0,-3 1 0,0 0 0,-1 0 0,0 0 0,0 0 0,1-1 0,0 0 0,-1-1 0,28 2 0,0-1 0,-26-1 0,1-1 0,-1 1 0,-3-1 0,0 1 0,-1-1 0,1 2 0,-1-1 0,-1 0 0,19-1 0,-2 0 0,0 1 0,-1 1 0,-7-1 0,-2 0 0,-6-2 0,0 1 0,8 0 0,-1 0 0,-6-2 0,-1 0 0,1 1 0,1 0 0,2-2 0,-2 1 0,-13 2 0,-2-1 606,4 0 1,0 1-607,-5-1 0,0 1 0,1 0 0,2 0 0,4 1 0,2 0 0,0 0 0,1-1 0,3 1 0,0 0 0,-2-2 0,0 0 0,6 1 0,-1-1 0,-7-2 0,1 1 0,10-1 0,1 1 0,-3 0 0,2 1 0,5-2 0,1 1 0,0 0 0,-1-1 0,-9 0 0,2 0 0,14-2 0,3 1 0,1 1 0,2 1 0,-21 0 0,2 1 0,1-1 0,2 1 0,0-1 0,-1 1 0,-5 0 0,0 0 0,0-1 0,1 0 0,1 0 0,-2 0 0,28-1 0,-2 1 0,-2-1 0,-2 1 0,-8-1 0,-1 0 0,-8 2 0,0 1 0,-1-2 0,0 2 0,-2-1 0,3 2 0,17 0 0,2 2 0,-5-1 0,3 2 0,-13 0 0,5 1 0,-1 0 0,-5-2 0,-1 1 0,0-1 1092,2 2 0,-1 0 0,0 0-905,-2-2 1,-1-1 0,-3 1-188,15 1 0,-1 1 0,11-1 0,-1 1 0,-16 0 0,-2-1 0,13 1 0,1 0 0,-9-1 0,-1 0 0,-6 0 0,-1-1 0,3-1 0,-1 0 0,-3 0 0,2 0 0,4 0 0,1 0 0,5 0 0,2 1 0,0 0 0,3 0 0,-22 0 0,1 0 0,1 0 0,-1-1 0,0 1 0,1-1 0,7 2 0,2-1 0,-5 0 0,17 0 0,-4-1 0,-3 0 0,-6 0 0,15-1 479,-22-1-479,-38 0 19,-23 0-19,-3 0 0,0 0 0,4 0 0,8 0 0,12-2 0,7 1 0,3-3 0,-11 2 0,-15-1 0,-12 2 0</inkml:trace>
+</inkml:ink>
+</file>
+
 <file path=ppt/notesMasters/notesMaster1.xml><?xml version="1.0" encoding="utf-8"?>
 <p:notesMaster xmlns:a="http://schemas.openxmlformats.org/drawingml/2006/main" xmlns:r="http://schemas.openxmlformats.org/officeDocument/2006/relationships" xmlns:p="http://schemas.openxmlformats.org/presentationml/2006/main">
   <p:cSld>
@@ -264,7 +684,7 @@
           <a:p>
             <a:fld id="{15D8E939-9ECB-9C46-A248-99A4B8126363}" type="datetimeFigureOut">
               <a:rPr lang="en-JP" smtClean="0"/>
-              <a:t>2026/03/17</a:t>
+              <a:t>5/19/26</a:t>
             </a:fld>
             <a:endParaRPr lang="en-JP"/>
           </a:p>
@@ -681,7 +1101,7 @@
           <a:p>
             <a:fld id="{B305A450-B214-F843-90D3-43D45AB970BF}" type="datetime1">
               <a:rPr lang="en-US" smtClean="0"/>
-              <a:t>3/17/26</a:t>
+              <a:t>5/19/26</a:t>
             </a:fld>
             <a:endParaRPr lang="en-JP"/>
           </a:p>
@@ -881,7 +1301,7 @@
           <a:p>
             <a:fld id="{3FE6076C-7478-7547-8EE6-BBCC8E0F5965}" type="datetime1">
               <a:rPr lang="en-US" smtClean="0"/>
-              <a:t>3/17/26</a:t>
+              <a:t>5/19/26</a:t>
             </a:fld>
             <a:endParaRPr lang="en-JP"/>
           </a:p>
@@ -1091,7 +1511,7 @@
           <a:p>
             <a:fld id="{9ACD9DBC-B76F-1F49-9ACB-B3C63B260788}" type="datetime1">
               <a:rPr lang="en-US" smtClean="0"/>
-              <a:t>3/17/26</a:t>
+              <a:t>5/19/26</a:t>
             </a:fld>
             <a:endParaRPr lang="en-JP"/>
           </a:p>
@@ -1291,7 +1711,7 @@
           <a:p>
             <a:fld id="{97256E53-50F3-8B41-827D-E71E7A78D7C8}" type="datetime1">
               <a:rPr lang="en-US" smtClean="0"/>
-              <a:t>3/17/26</a:t>
+              <a:t>5/19/26</a:t>
             </a:fld>
             <a:endParaRPr lang="en-JP"/>
           </a:p>
@@ -1567,7 +1987,7 @@
           <a:p>
             <a:fld id="{60AD3F61-4B41-B048-9345-533AA47C1AFA}" type="datetime1">
               <a:rPr lang="en-US" smtClean="0"/>
-              <a:t>3/17/26</a:t>
+              <a:t>5/19/26</a:t>
             </a:fld>
             <a:endParaRPr lang="en-JP"/>
           </a:p>
@@ -1835,7 +2255,7 @@
           <a:p>
             <a:fld id="{9E0C3DDA-75D5-FE45-B27F-09B23348A3CF}" type="datetime1">
               <a:rPr lang="en-US" smtClean="0"/>
-              <a:t>3/17/26</a:t>
+              <a:t>5/19/26</a:t>
             </a:fld>
             <a:endParaRPr lang="en-JP"/>
           </a:p>
@@ -2250,7 +2670,7 @@
           <a:p>
             <a:fld id="{91B16E66-205B-D348-AF09-8C13DA8BDFF9}" type="datetime1">
               <a:rPr lang="en-US" smtClean="0"/>
-              <a:t>3/17/26</a:t>
+              <a:t>5/19/26</a:t>
             </a:fld>
             <a:endParaRPr lang="en-JP"/>
           </a:p>
@@ -2392,7 +2812,7 @@
           <a:p>
             <a:fld id="{222CE9F2-560E-4648-82A4-0C4186C23AAC}" type="datetime1">
               <a:rPr lang="en-US" smtClean="0"/>
-              <a:t>3/17/26</a:t>
+              <a:t>5/19/26</a:t>
             </a:fld>
             <a:endParaRPr lang="en-JP"/>
           </a:p>
@@ -2505,7 +2925,7 @@
           <a:p>
             <a:fld id="{2914F908-ED62-3949-B616-21C7C363772F}" type="datetime1">
               <a:rPr lang="en-US" smtClean="0"/>
-              <a:t>3/17/26</a:t>
+              <a:t>5/19/26</a:t>
             </a:fld>
             <a:endParaRPr lang="en-JP"/>
           </a:p>
@@ -2818,7 +3238,7 @@
           <a:p>
             <a:fld id="{8280A505-8893-D540-9413-F8B9ED1E178A}" type="datetime1">
               <a:rPr lang="en-US" smtClean="0"/>
-              <a:t>3/17/26</a:t>
+              <a:t>5/19/26</a:t>
             </a:fld>
             <a:endParaRPr lang="en-JP"/>
           </a:p>
@@ -3107,7 +3527,7 @@
           <a:p>
             <a:fld id="{40CD7CE6-B77F-5744-9AB9-6E4139649818}" type="datetime1">
               <a:rPr lang="en-US" smtClean="0"/>
-              <a:t>3/17/26</a:t>
+              <a:t>5/19/26</a:t>
             </a:fld>
             <a:endParaRPr lang="en-JP"/>
           </a:p>
@@ -3350,7 +3770,7 @@
           <a:p>
             <a:fld id="{DC28B759-A9A1-7B41-B30F-900953345635}" type="datetime1">
               <a:rPr lang="en-US" smtClean="0"/>
-              <a:t>3/17/26</a:t>
+              <a:t>5/19/26</a:t>
             </a:fld>
             <a:endParaRPr lang="en-JP"/>
           </a:p>
@@ -3954,8 +4374,8 @@
           </a:p>
         </p:txBody>
       </p:sp>
-      <mc:AlternateContent xmlns:mc="http://schemas.openxmlformats.org/markup-compatibility/2006">
-        <mc:Choice xmlns:a14="http://schemas.microsoft.com/office/drawing/2010/main" Requires="a14">
+      <mc:AlternateContent xmlns:mc="http://schemas.openxmlformats.org/markup-compatibility/2006" xmlns:a14="http://schemas.microsoft.com/office/drawing/2010/main">
+        <mc:Choice Requires="a14">
           <p:sp>
             <p:nvSpPr>
               <p:cNvPr id="3" name="Content Placeholder 2">
@@ -4161,7 +4581,7 @@
             </p:txBody>
           </p:sp>
         </mc:Choice>
-        <mc:Fallback>
+        <mc:Fallback xmlns="">
           <p:sp>
             <p:nvSpPr>
               <p:cNvPr id="3" name="Content Placeholder 2">
@@ -4693,6 +5113,108 @@
           </a:p>
         </p:txBody>
       </p:sp>
+      <mc:AlternateContent xmlns:mc="http://schemas.openxmlformats.org/markup-compatibility/2006">
+        <mc:Choice xmlns:p14="http://schemas.microsoft.com/office/powerpoint/2010/main" Requires="p14">
+          <p:contentPart p14:bwMode="auto" r:id="rId3">
+            <p14:nvContentPartPr>
+              <p14:cNvPr id="5" name="インク 4">
+                <a:extLst>
+                  <a:ext uri="{FF2B5EF4-FFF2-40B4-BE49-F238E27FC236}">
+                    <a16:creationId xmlns:a16="http://schemas.microsoft.com/office/drawing/2014/main" id="{C373D898-02AF-F0C8-0F90-BE86D85A871A}"/>
+                  </a:ext>
+                </a:extLst>
+              </p14:cNvPr>
+              <p14:cNvContentPartPr/>
+              <p14:nvPr/>
+            </p14:nvContentPartPr>
+            <p14:xfrm>
+              <a:off x="5343534" y="3886821"/>
+              <a:ext cx="957960" cy="23760"/>
+            </p14:xfrm>
+          </p:contentPart>
+        </mc:Choice>
+        <mc:Fallback>
+          <p:pic>
+            <p:nvPicPr>
+              <p:cNvPr id="5" name="インク 4">
+                <a:extLst>
+                  <a:ext uri="{FF2B5EF4-FFF2-40B4-BE49-F238E27FC236}">
+                    <a16:creationId xmlns:a16="http://schemas.microsoft.com/office/drawing/2014/main" id="{C373D898-02AF-F0C8-0F90-BE86D85A871A}"/>
+                  </a:ext>
+                </a:extLst>
+              </p:cNvPr>
+              <p:cNvPicPr/>
+              <p:nvPr/>
+            </p:nvPicPr>
+            <p:blipFill>
+              <a:blip r:embed="rId4"/>
+              <a:stretch>
+                <a:fillRect/>
+              </a:stretch>
+            </p:blipFill>
+            <p:spPr>
+              <a:xfrm>
+                <a:off x="5307534" y="3851181"/>
+                <a:ext cx="1029600" cy="95400"/>
+              </a:xfrm>
+              <a:prstGeom prst="rect">
+                <a:avLst/>
+              </a:prstGeom>
+            </p:spPr>
+          </p:pic>
+        </mc:Fallback>
+      </mc:AlternateContent>
+      <mc:AlternateContent xmlns:mc="http://schemas.openxmlformats.org/markup-compatibility/2006">
+        <mc:Choice xmlns:p14="http://schemas.microsoft.com/office/powerpoint/2010/main" Requires="p14">
+          <p:contentPart p14:bwMode="auto" r:id="rId5">
+            <p14:nvContentPartPr>
+              <p14:cNvPr id="6" name="インク 5">
+                <a:extLst>
+                  <a:ext uri="{FF2B5EF4-FFF2-40B4-BE49-F238E27FC236}">
+                    <a16:creationId xmlns:a16="http://schemas.microsoft.com/office/drawing/2014/main" id="{3E4E43DB-FF83-537F-F844-BC0069567002}"/>
+                  </a:ext>
+                </a:extLst>
+              </p14:cNvPr>
+              <p14:cNvContentPartPr/>
+              <p14:nvPr/>
+            </p14:nvContentPartPr>
+            <p14:xfrm>
+              <a:off x="5178654" y="5987781"/>
+              <a:ext cx="1408680" cy="12600"/>
+            </p14:xfrm>
+          </p:contentPart>
+        </mc:Choice>
+        <mc:Fallback>
+          <p:pic>
+            <p:nvPicPr>
+              <p:cNvPr id="6" name="インク 5">
+                <a:extLst>
+                  <a:ext uri="{FF2B5EF4-FFF2-40B4-BE49-F238E27FC236}">
+                    <a16:creationId xmlns:a16="http://schemas.microsoft.com/office/drawing/2014/main" id="{3E4E43DB-FF83-537F-F844-BC0069567002}"/>
+                  </a:ext>
+                </a:extLst>
+              </p:cNvPr>
+              <p:cNvPicPr/>
+              <p:nvPr/>
+            </p:nvPicPr>
+            <p:blipFill>
+              <a:blip r:embed="rId6"/>
+              <a:stretch>
+                <a:fillRect/>
+              </a:stretch>
+            </p:blipFill>
+            <p:spPr>
+              <a:xfrm>
+                <a:off x="5143014" y="5951781"/>
+                <a:ext cx="1480320" cy="84240"/>
+              </a:xfrm>
+              <a:prstGeom prst="rect">
+                <a:avLst/>
+              </a:prstGeom>
+            </p:spPr>
+          </p:pic>
+        </mc:Fallback>
+      </mc:AlternateContent>
     </p:spTree>
     <p:extLst>
       <p:ext uri="{BB962C8B-B14F-4D97-AF65-F5344CB8AC3E}">
@@ -4866,6 +5388,57 @@
           </a:fontRef>
         </p:style>
       </p:cxnSp>
+      <mc:AlternateContent xmlns:mc="http://schemas.openxmlformats.org/markup-compatibility/2006">
+        <mc:Choice xmlns:p14="http://schemas.microsoft.com/office/powerpoint/2010/main" Requires="p14">
+          <p:contentPart p14:bwMode="auto" r:id="rId3">
+            <p14:nvContentPartPr>
+              <p14:cNvPr id="3" name="インク 2">
+                <a:extLst>
+                  <a:ext uri="{FF2B5EF4-FFF2-40B4-BE49-F238E27FC236}">
+                    <a16:creationId xmlns:a16="http://schemas.microsoft.com/office/drawing/2014/main" id="{A0B37F05-1F1A-61AA-F436-E9BA3D082822}"/>
+                  </a:ext>
+                </a:extLst>
+              </p14:cNvPr>
+              <p14:cNvContentPartPr/>
+              <p14:nvPr/>
+            </p14:nvContentPartPr>
+            <p14:xfrm>
+              <a:off x="2975814" y="5798421"/>
+              <a:ext cx="5479560" cy="61560"/>
+            </p14:xfrm>
+          </p:contentPart>
+        </mc:Choice>
+        <mc:Fallback>
+          <p:pic>
+            <p:nvPicPr>
+              <p:cNvPr id="3" name="インク 2">
+                <a:extLst>
+                  <a:ext uri="{FF2B5EF4-FFF2-40B4-BE49-F238E27FC236}">
+                    <a16:creationId xmlns:a16="http://schemas.microsoft.com/office/drawing/2014/main" id="{A0B37F05-1F1A-61AA-F436-E9BA3D082822}"/>
+                  </a:ext>
+                </a:extLst>
+              </p:cNvPr>
+              <p:cNvPicPr/>
+              <p:nvPr/>
+            </p:nvPicPr>
+            <p:blipFill>
+              <a:blip r:embed="rId4"/>
+              <a:stretch>
+                <a:fillRect/>
+              </a:stretch>
+            </p:blipFill>
+            <p:spPr>
+              <a:xfrm>
+                <a:off x="2939814" y="5762421"/>
+                <a:ext cx="5551200" cy="133200"/>
+              </a:xfrm>
+              <a:prstGeom prst="rect">
+                <a:avLst/>
+              </a:prstGeom>
+            </p:spPr>
+          </p:pic>
+        </mc:Fallback>
+      </mc:AlternateContent>
     </p:spTree>
     <p:extLst>
       <p:ext uri="{BB962C8B-B14F-4D97-AF65-F5344CB8AC3E}">
@@ -5568,6 +6141,159 @@
           </a:p>
         </p:txBody>
       </p:sp>
+      <mc:AlternateContent xmlns:mc="http://schemas.openxmlformats.org/markup-compatibility/2006">
+        <mc:Choice xmlns:p14="http://schemas.microsoft.com/office/powerpoint/2010/main" Requires="p14">
+          <p:contentPart p14:bwMode="auto" r:id="rId3">
+            <p14:nvContentPartPr>
+              <p14:cNvPr id="5" name="インク 4">
+                <a:extLst>
+                  <a:ext uri="{FF2B5EF4-FFF2-40B4-BE49-F238E27FC236}">
+                    <a16:creationId xmlns:a16="http://schemas.microsoft.com/office/drawing/2014/main" id="{260F9842-2D7B-8E94-C353-322112A8A6C8}"/>
+                  </a:ext>
+                </a:extLst>
+              </p14:cNvPr>
+              <p14:cNvContentPartPr/>
+              <p14:nvPr/>
+            </p14:nvContentPartPr>
+            <p14:xfrm>
+              <a:off x="2636677" y="3161144"/>
+              <a:ext cx="5368320" cy="61200"/>
+            </p14:xfrm>
+          </p:contentPart>
+        </mc:Choice>
+        <mc:Fallback>
+          <p:pic>
+            <p:nvPicPr>
+              <p:cNvPr id="5" name="インク 4">
+                <a:extLst>
+                  <a:ext uri="{FF2B5EF4-FFF2-40B4-BE49-F238E27FC236}">
+                    <a16:creationId xmlns:a16="http://schemas.microsoft.com/office/drawing/2014/main" id="{260F9842-2D7B-8E94-C353-322112A8A6C8}"/>
+                  </a:ext>
+                </a:extLst>
+              </p:cNvPr>
+              <p:cNvPicPr/>
+              <p:nvPr/>
+            </p:nvPicPr>
+            <p:blipFill>
+              <a:blip r:embed="rId4"/>
+              <a:stretch>
+                <a:fillRect/>
+              </a:stretch>
+            </p:blipFill>
+            <p:spPr>
+              <a:xfrm>
+                <a:off x="2601037" y="3125144"/>
+                <a:ext cx="5439960" cy="132840"/>
+              </a:xfrm>
+              <a:prstGeom prst="rect">
+                <a:avLst/>
+              </a:prstGeom>
+            </p:spPr>
+          </p:pic>
+        </mc:Fallback>
+      </mc:AlternateContent>
+      <mc:AlternateContent xmlns:mc="http://schemas.openxmlformats.org/markup-compatibility/2006">
+        <mc:Choice xmlns:p14="http://schemas.microsoft.com/office/powerpoint/2010/main" Requires="p14">
+          <p:contentPart p14:bwMode="auto" r:id="rId5">
+            <p14:nvContentPartPr>
+              <p14:cNvPr id="6" name="インク 5">
+                <a:extLst>
+                  <a:ext uri="{FF2B5EF4-FFF2-40B4-BE49-F238E27FC236}">
+                    <a16:creationId xmlns:a16="http://schemas.microsoft.com/office/drawing/2014/main" id="{956F0F61-4C43-0163-AE65-4F9BE939A734}"/>
+                  </a:ext>
+                </a:extLst>
+              </p14:cNvPr>
+              <p14:cNvContentPartPr/>
+              <p14:nvPr/>
+            </p14:nvContentPartPr>
+            <p14:xfrm>
+              <a:off x="4377277" y="4740104"/>
+              <a:ext cx="348120" cy="6840"/>
+            </p14:xfrm>
+          </p:contentPart>
+        </mc:Choice>
+        <mc:Fallback>
+          <p:pic>
+            <p:nvPicPr>
+              <p:cNvPr id="6" name="インク 5">
+                <a:extLst>
+                  <a:ext uri="{FF2B5EF4-FFF2-40B4-BE49-F238E27FC236}">
+                    <a16:creationId xmlns:a16="http://schemas.microsoft.com/office/drawing/2014/main" id="{956F0F61-4C43-0163-AE65-4F9BE939A734}"/>
+                  </a:ext>
+                </a:extLst>
+              </p:cNvPr>
+              <p:cNvPicPr/>
+              <p:nvPr/>
+            </p:nvPicPr>
+            <p:blipFill>
+              <a:blip r:embed="rId6"/>
+              <a:stretch>
+                <a:fillRect/>
+              </a:stretch>
+            </p:blipFill>
+            <p:spPr>
+              <a:xfrm>
+                <a:off x="4341637" y="4704464"/>
+                <a:ext cx="419760" cy="78480"/>
+              </a:xfrm>
+              <a:prstGeom prst="rect">
+                <a:avLst/>
+              </a:prstGeom>
+            </p:spPr>
+          </p:pic>
+        </mc:Fallback>
+      </mc:AlternateContent>
+      <mc:AlternateContent xmlns:mc="http://schemas.openxmlformats.org/markup-compatibility/2006">
+        <mc:Choice xmlns:p14="http://schemas.microsoft.com/office/powerpoint/2010/main" Requires="p14">
+          <p:contentPart p14:bwMode="auto" r:id="rId7">
+            <p14:nvContentPartPr>
+              <p14:cNvPr id="7" name="インク 6">
+                <a:extLst>
+                  <a:ext uri="{FF2B5EF4-FFF2-40B4-BE49-F238E27FC236}">
+                    <a16:creationId xmlns:a16="http://schemas.microsoft.com/office/drawing/2014/main" id="{95F8AEE0-71BC-2920-1AA9-5FE3F765EB4F}"/>
+                  </a:ext>
+                </a:extLst>
+              </p14:cNvPr>
+              <p14:cNvContentPartPr/>
+              <p14:nvPr/>
+            </p14:nvContentPartPr>
+            <p14:xfrm>
+              <a:off x="4268917" y="5918744"/>
+              <a:ext cx="363240" cy="12960"/>
+            </p14:xfrm>
+          </p:contentPart>
+        </mc:Choice>
+        <mc:Fallback>
+          <p:pic>
+            <p:nvPicPr>
+              <p:cNvPr id="7" name="インク 6">
+                <a:extLst>
+                  <a:ext uri="{FF2B5EF4-FFF2-40B4-BE49-F238E27FC236}">
+                    <a16:creationId xmlns:a16="http://schemas.microsoft.com/office/drawing/2014/main" id="{95F8AEE0-71BC-2920-1AA9-5FE3F765EB4F}"/>
+                  </a:ext>
+                </a:extLst>
+              </p:cNvPr>
+              <p:cNvPicPr/>
+              <p:nvPr/>
+            </p:nvPicPr>
+            <p:blipFill>
+              <a:blip r:embed="rId8"/>
+              <a:stretch>
+                <a:fillRect/>
+              </a:stretch>
+            </p:blipFill>
+            <p:spPr>
+              <a:xfrm>
+                <a:off x="4233277" y="5883104"/>
+                <a:ext cx="434880" cy="84600"/>
+              </a:xfrm>
+              <a:prstGeom prst="rect">
+                <a:avLst/>
+              </a:prstGeom>
+            </p:spPr>
+          </p:pic>
+        </mc:Fallback>
+      </mc:AlternateContent>
     </p:spTree>
     <p:extLst>
       <p:ext uri="{BB962C8B-B14F-4D97-AF65-F5344CB8AC3E}">
@@ -5743,6 +6469,382 @@
           </a:fontRef>
         </p:style>
       </p:cxnSp>
+      <mc:AlternateContent xmlns:mc="http://schemas.openxmlformats.org/markup-compatibility/2006">
+        <mc:Choice xmlns:p14="http://schemas.microsoft.com/office/powerpoint/2010/main" Requires="p14">
+          <p:contentPart p14:bwMode="auto" r:id="rId3">
+            <p14:nvContentPartPr>
+              <p14:cNvPr id="3" name="インク 2">
+                <a:extLst>
+                  <a:ext uri="{FF2B5EF4-FFF2-40B4-BE49-F238E27FC236}">
+                    <a16:creationId xmlns:a16="http://schemas.microsoft.com/office/drawing/2014/main" id="{DDCAA7FE-9661-64D1-B51D-D66BAEE6998B}"/>
+                  </a:ext>
+                </a:extLst>
+              </p14:cNvPr>
+              <p14:cNvContentPartPr/>
+              <p14:nvPr/>
+            </p14:nvContentPartPr>
+            <p14:xfrm>
+              <a:off x="6053797" y="3891584"/>
+              <a:ext cx="412200" cy="326520"/>
+            </p14:xfrm>
+          </p:contentPart>
+        </mc:Choice>
+        <mc:Fallback>
+          <p:pic>
+            <p:nvPicPr>
+              <p:cNvPr id="3" name="インク 2">
+                <a:extLst>
+                  <a:ext uri="{FF2B5EF4-FFF2-40B4-BE49-F238E27FC236}">
+                    <a16:creationId xmlns:a16="http://schemas.microsoft.com/office/drawing/2014/main" id="{DDCAA7FE-9661-64D1-B51D-D66BAEE6998B}"/>
+                  </a:ext>
+                </a:extLst>
+              </p:cNvPr>
+              <p:cNvPicPr/>
+              <p:nvPr/>
+            </p:nvPicPr>
+            <p:blipFill>
+              <a:blip r:embed="rId4"/>
+              <a:stretch>
+                <a:fillRect/>
+              </a:stretch>
+            </p:blipFill>
+            <p:spPr>
+              <a:xfrm>
+                <a:off x="6018157" y="3855944"/>
+                <a:ext cx="483840" cy="398160"/>
+              </a:xfrm>
+              <a:prstGeom prst="rect">
+                <a:avLst/>
+              </a:prstGeom>
+            </p:spPr>
+          </p:pic>
+        </mc:Fallback>
+      </mc:AlternateContent>
+      <p:grpSp>
+        <p:nvGrpSpPr>
+          <p:cNvPr id="10" name="グループ化 9">
+            <a:extLst>
+              <a:ext uri="{FF2B5EF4-FFF2-40B4-BE49-F238E27FC236}">
+                <a16:creationId xmlns:a16="http://schemas.microsoft.com/office/drawing/2014/main" id="{39B93CFC-10A3-1BAA-5746-82C6DEFEA59F}"/>
+              </a:ext>
+            </a:extLst>
+          </p:cNvPr>
+          <p:cNvGrpSpPr/>
+          <p:nvPr/>
+        </p:nvGrpSpPr>
+        <p:grpSpPr>
+          <a:xfrm>
+            <a:off x="4242997" y="3912464"/>
+            <a:ext cx="1720440" cy="283320"/>
+            <a:chOff x="4242997" y="3912464"/>
+            <a:chExt cx="1720440" cy="283320"/>
+          </a:xfrm>
+        </p:grpSpPr>
+        <mc:AlternateContent xmlns:mc="http://schemas.openxmlformats.org/markup-compatibility/2006">
+          <mc:Choice xmlns:p14="http://schemas.microsoft.com/office/powerpoint/2010/main" Requires="p14">
+            <p:contentPart p14:bwMode="auto" r:id="rId5">
+              <p14:nvContentPartPr>
+                <p14:cNvPr id="6" name="インク 5">
+                  <a:extLst>
+                    <a:ext uri="{FF2B5EF4-FFF2-40B4-BE49-F238E27FC236}">
+                      <a16:creationId xmlns:a16="http://schemas.microsoft.com/office/drawing/2014/main" id="{4EC6F5DF-9443-59F2-9E1A-F4D701DBDC6D}"/>
+                    </a:ext>
+                  </a:extLst>
+                </p14:cNvPr>
+                <p14:cNvContentPartPr/>
+                <p14:nvPr/>
+              </p14:nvContentPartPr>
+              <p14:xfrm>
+                <a:off x="4242997" y="3912464"/>
+                <a:ext cx="412920" cy="271440"/>
+              </p14:xfrm>
+            </p:contentPart>
+          </mc:Choice>
+          <mc:Fallback>
+            <p:pic>
+              <p:nvPicPr>
+                <p:cNvPr id="6" name="インク 5">
+                  <a:extLst>
+                    <a:ext uri="{FF2B5EF4-FFF2-40B4-BE49-F238E27FC236}">
+                      <a16:creationId xmlns:a16="http://schemas.microsoft.com/office/drawing/2014/main" id="{4EC6F5DF-9443-59F2-9E1A-F4D701DBDC6D}"/>
+                    </a:ext>
+                  </a:extLst>
+                </p:cNvPr>
+                <p:cNvPicPr/>
+                <p:nvPr/>
+              </p:nvPicPr>
+              <p:blipFill>
+                <a:blip r:embed="rId6"/>
+                <a:stretch>
+                  <a:fillRect/>
+                </a:stretch>
+              </p:blipFill>
+              <p:spPr>
+                <a:xfrm>
+                  <a:off x="4207357" y="3876824"/>
+                  <a:ext cx="484560" cy="343080"/>
+                </a:xfrm>
+                <a:prstGeom prst="rect">
+                  <a:avLst/>
+                </a:prstGeom>
+              </p:spPr>
+            </p:pic>
+          </mc:Fallback>
+        </mc:AlternateContent>
+        <mc:AlternateContent xmlns:mc="http://schemas.openxmlformats.org/markup-compatibility/2006">
+          <mc:Choice xmlns:p14="http://schemas.microsoft.com/office/powerpoint/2010/main" Requires="p14">
+            <p:contentPart p14:bwMode="auto" r:id="rId7">
+              <p14:nvContentPartPr>
+                <p14:cNvPr id="7" name="インク 6">
+                  <a:extLst>
+                    <a:ext uri="{FF2B5EF4-FFF2-40B4-BE49-F238E27FC236}">
+                      <a16:creationId xmlns:a16="http://schemas.microsoft.com/office/drawing/2014/main" id="{572BD7EC-21DE-7CB0-FEFA-5EA2F17FED78}"/>
+                    </a:ext>
+                  </a:extLst>
+                </p14:cNvPr>
+                <p14:cNvContentPartPr/>
+                <p14:nvPr/>
+              </p14:nvContentPartPr>
+              <p14:xfrm>
+                <a:off x="4817917" y="4038824"/>
+                <a:ext cx="134280" cy="156960"/>
+              </p14:xfrm>
+            </p:contentPart>
+          </mc:Choice>
+          <mc:Fallback>
+            <p:pic>
+              <p:nvPicPr>
+                <p:cNvPr id="7" name="インク 6">
+                  <a:extLst>
+                    <a:ext uri="{FF2B5EF4-FFF2-40B4-BE49-F238E27FC236}">
+                      <a16:creationId xmlns:a16="http://schemas.microsoft.com/office/drawing/2014/main" id="{572BD7EC-21DE-7CB0-FEFA-5EA2F17FED78}"/>
+                    </a:ext>
+                  </a:extLst>
+                </p:cNvPr>
+                <p:cNvPicPr/>
+                <p:nvPr/>
+              </p:nvPicPr>
+              <p:blipFill>
+                <a:blip r:embed="rId8"/>
+                <a:stretch>
+                  <a:fillRect/>
+                </a:stretch>
+              </p:blipFill>
+              <p:spPr>
+                <a:xfrm>
+                  <a:off x="4782277" y="4003184"/>
+                  <a:ext cx="205920" cy="228600"/>
+                </a:xfrm>
+                <a:prstGeom prst="rect">
+                  <a:avLst/>
+                </a:prstGeom>
+              </p:spPr>
+            </p:pic>
+          </mc:Fallback>
+        </mc:AlternateContent>
+        <mc:AlternateContent xmlns:mc="http://schemas.openxmlformats.org/markup-compatibility/2006">
+          <mc:Choice xmlns:p14="http://schemas.microsoft.com/office/powerpoint/2010/main" Requires="p14">
+            <p:contentPart p14:bwMode="auto" r:id="rId9">
+              <p14:nvContentPartPr>
+                <p14:cNvPr id="8" name="インク 7">
+                  <a:extLst>
+                    <a:ext uri="{FF2B5EF4-FFF2-40B4-BE49-F238E27FC236}">
+                      <a16:creationId xmlns:a16="http://schemas.microsoft.com/office/drawing/2014/main" id="{EF15DF09-2C67-A414-2215-7B3224A9DFD3}"/>
+                    </a:ext>
+                  </a:extLst>
+                </p14:cNvPr>
+                <p14:cNvContentPartPr/>
+                <p14:nvPr/>
+              </p14:nvContentPartPr>
+              <p14:xfrm>
+                <a:off x="4903957" y="4089224"/>
+                <a:ext cx="1059480" cy="55440"/>
+              </p14:xfrm>
+            </p:contentPart>
+          </mc:Choice>
+          <mc:Fallback>
+            <p:pic>
+              <p:nvPicPr>
+                <p:cNvPr id="8" name="インク 7">
+                  <a:extLst>
+                    <a:ext uri="{FF2B5EF4-FFF2-40B4-BE49-F238E27FC236}">
+                      <a16:creationId xmlns:a16="http://schemas.microsoft.com/office/drawing/2014/main" id="{EF15DF09-2C67-A414-2215-7B3224A9DFD3}"/>
+                    </a:ext>
+                  </a:extLst>
+                </p:cNvPr>
+                <p:cNvPicPr/>
+                <p:nvPr/>
+              </p:nvPicPr>
+              <p:blipFill>
+                <a:blip r:embed="rId10"/>
+                <a:stretch>
+                  <a:fillRect/>
+                </a:stretch>
+              </p:blipFill>
+              <p:spPr>
+                <a:xfrm>
+                  <a:off x="4868317" y="4053224"/>
+                  <a:ext cx="1131120" cy="127080"/>
+                </a:xfrm>
+                <a:prstGeom prst="rect">
+                  <a:avLst/>
+                </a:prstGeom>
+              </p:spPr>
+            </p:pic>
+          </mc:Fallback>
+        </mc:AlternateContent>
+      </p:grpSp>
+      <mc:AlternateContent xmlns:mc="http://schemas.openxmlformats.org/markup-compatibility/2006">
+        <mc:Choice xmlns:p14="http://schemas.microsoft.com/office/powerpoint/2010/main" Requires="p14">
+          <p:contentPart p14:bwMode="auto" r:id="rId11">
+            <p14:nvContentPartPr>
+              <p14:cNvPr id="11" name="インク 10">
+                <a:extLst>
+                  <a:ext uri="{FF2B5EF4-FFF2-40B4-BE49-F238E27FC236}">
+                    <a16:creationId xmlns:a16="http://schemas.microsoft.com/office/drawing/2014/main" id="{F8F1ED19-DCDC-1C2B-286A-FD9D9DE46D69}"/>
+                  </a:ext>
+                </a:extLst>
+              </p14:cNvPr>
+              <p14:cNvContentPartPr/>
+              <p14:nvPr/>
+            </p14:nvContentPartPr>
+            <p14:xfrm>
+              <a:off x="6631237" y="4217024"/>
+              <a:ext cx="1032120" cy="8280"/>
+            </p14:xfrm>
+          </p:contentPart>
+        </mc:Choice>
+        <mc:Fallback>
+          <p:pic>
+            <p:nvPicPr>
+              <p:cNvPr id="11" name="インク 10">
+                <a:extLst>
+                  <a:ext uri="{FF2B5EF4-FFF2-40B4-BE49-F238E27FC236}">
+                    <a16:creationId xmlns:a16="http://schemas.microsoft.com/office/drawing/2014/main" id="{F8F1ED19-DCDC-1C2B-286A-FD9D9DE46D69}"/>
+                  </a:ext>
+                </a:extLst>
+              </p:cNvPr>
+              <p:cNvPicPr/>
+              <p:nvPr/>
+            </p:nvPicPr>
+            <p:blipFill>
+              <a:blip r:embed="rId12"/>
+              <a:stretch>
+                <a:fillRect/>
+              </a:stretch>
+            </p:blipFill>
+            <p:spPr>
+              <a:xfrm>
+                <a:off x="6595237" y="4181384"/>
+                <a:ext cx="1103760" cy="79920"/>
+              </a:xfrm>
+              <a:prstGeom prst="rect">
+                <a:avLst/>
+              </a:prstGeom>
+            </p:spPr>
+          </p:pic>
+        </mc:Fallback>
+      </mc:AlternateContent>
+      <p:sp>
+        <p:nvSpPr>
+          <p:cNvPr id="12" name="直角三角形 11">
+            <a:extLst>
+              <a:ext uri="{FF2B5EF4-FFF2-40B4-BE49-F238E27FC236}">
+                <a16:creationId xmlns:a16="http://schemas.microsoft.com/office/drawing/2014/main" id="{71E31E26-9C10-5257-8966-C8E293BE0530}"/>
+              </a:ext>
+            </a:extLst>
+          </p:cNvPr>
+          <p:cNvSpPr/>
+          <p:nvPr/>
+        </p:nvSpPr>
+        <p:spPr>
+          <a:xfrm flipH="1">
+            <a:off x="4449457" y="2929128"/>
+            <a:ext cx="1792317" cy="1215536"/>
+          </a:xfrm>
+          <a:prstGeom prst="rtTriangle">
+            <a:avLst/>
+          </a:prstGeom>
+          <a:solidFill>
+            <a:srgbClr val="FFFF00"/>
+          </a:solidFill>
+          <a:ln>
+            <a:solidFill>
+              <a:srgbClr val="FFFF00"/>
+            </a:solidFill>
+          </a:ln>
+        </p:spPr>
+        <p:style>
+          <a:lnRef idx="2">
+            <a:schemeClr val="accent1">
+              <a:shade val="15000"/>
+            </a:schemeClr>
+          </a:lnRef>
+          <a:fillRef idx="1">
+            <a:schemeClr val="accent1"/>
+          </a:fillRef>
+          <a:effectRef idx="0">
+            <a:schemeClr val="accent1"/>
+          </a:effectRef>
+          <a:fontRef idx="minor">
+            <a:schemeClr val="lt1"/>
+          </a:fontRef>
+        </p:style>
+        <p:txBody>
+          <a:bodyPr rtlCol="0" anchor="ctr"/>
+          <a:lstStyle/>
+          <a:p>
+            <a:pPr algn="ctr"/>
+            <a:endParaRPr kumimoji="1" lang="ja-JP" altLang="en-US"/>
+          </a:p>
+        </p:txBody>
+      </p:sp>
+      <p:sp>
+        <p:nvSpPr>
+          <p:cNvPr id="15" name="直角三角形 14">
+            <a:extLst>
+              <a:ext uri="{FF2B5EF4-FFF2-40B4-BE49-F238E27FC236}">
+                <a16:creationId xmlns:a16="http://schemas.microsoft.com/office/drawing/2014/main" id="{26A1D21B-909A-5E27-8840-80EF407A22FC}"/>
+              </a:ext>
+            </a:extLst>
+          </p:cNvPr>
+          <p:cNvSpPr/>
+          <p:nvPr/>
+        </p:nvSpPr>
+        <p:spPr>
+          <a:xfrm flipH="1">
+            <a:off x="6359360" y="3749370"/>
+            <a:ext cx="1472130" cy="395294"/>
+          </a:xfrm>
+          <a:prstGeom prst="rtTriangle">
+            <a:avLst/>
+          </a:prstGeom>
+        </p:spPr>
+        <p:style>
+          <a:lnRef idx="2">
+            <a:schemeClr val="accent1">
+              <a:shade val="15000"/>
+            </a:schemeClr>
+          </a:lnRef>
+          <a:fillRef idx="1">
+            <a:schemeClr val="accent1"/>
+          </a:fillRef>
+          <a:effectRef idx="0">
+            <a:schemeClr val="accent1"/>
+          </a:effectRef>
+          <a:fontRef idx="minor">
+            <a:schemeClr val="lt1"/>
+          </a:fontRef>
+        </p:style>
+        <p:txBody>
+          <a:bodyPr rtlCol="0" anchor="ctr"/>
+          <a:lstStyle/>
+          <a:p>
+            <a:pPr algn="ctr"/>
+            <a:endParaRPr kumimoji="1" lang="ja-JP" altLang="en-US"/>
+          </a:p>
+        </p:txBody>
+      </p:sp>
     </p:spTree>
     <p:extLst>
       <p:ext uri="{BB962C8B-B14F-4D97-AF65-F5344CB8AC3E}">
@@ -5918,6 +7020,122 @@
           </a:fontRef>
         </p:style>
       </p:cxnSp>
+      <p:sp>
+        <p:nvSpPr>
+          <p:cNvPr id="5" name="直角三角形 4">
+            <a:extLst>
+              <a:ext uri="{FF2B5EF4-FFF2-40B4-BE49-F238E27FC236}">
+                <a16:creationId xmlns:a16="http://schemas.microsoft.com/office/drawing/2014/main" id="{574284C6-7A52-4679-976D-F98948EBA4E4}"/>
+              </a:ext>
+            </a:extLst>
+          </p:cNvPr>
+          <p:cNvSpPr/>
+          <p:nvPr/>
+        </p:nvSpPr>
+        <p:spPr>
+          <a:xfrm flipH="1">
+            <a:off x="3498571" y="2263564"/>
+            <a:ext cx="4319091" cy="2460437"/>
+          </a:xfrm>
+          <a:prstGeom prst="rtTriangle">
+            <a:avLst/>
+          </a:prstGeom>
+        </p:spPr>
+        <p:style>
+          <a:lnRef idx="2">
+            <a:schemeClr val="accent1">
+              <a:shade val="15000"/>
+            </a:schemeClr>
+          </a:lnRef>
+          <a:fillRef idx="1">
+            <a:schemeClr val="accent1"/>
+          </a:fillRef>
+          <a:effectRef idx="0">
+            <a:schemeClr val="accent1"/>
+          </a:effectRef>
+          <a:fontRef idx="minor">
+            <a:schemeClr val="lt1"/>
+          </a:fontRef>
+        </p:style>
+        <p:txBody>
+          <a:bodyPr rtlCol="0" anchor="ctr"/>
+          <a:lstStyle/>
+          <a:p>
+            <a:pPr algn="ctr"/>
+            <a:endParaRPr kumimoji="1" lang="ja-JP" altLang="en-US"/>
+          </a:p>
+        </p:txBody>
+      </p:sp>
+      <p:sp>
+        <p:nvSpPr>
+          <p:cNvPr id="6" name="テキスト ボックス 5">
+            <a:extLst>
+              <a:ext uri="{FF2B5EF4-FFF2-40B4-BE49-F238E27FC236}">
+                <a16:creationId xmlns:a16="http://schemas.microsoft.com/office/drawing/2014/main" id="{E5A57E9B-47DB-5AD4-9D8F-482884693B94}"/>
+              </a:ext>
+            </a:extLst>
+          </p:cNvPr>
+          <p:cNvSpPr txBox="1"/>
+          <p:nvPr/>
+        </p:nvSpPr>
+        <p:spPr>
+          <a:xfrm>
+            <a:off x="9197009" y="2133600"/>
+            <a:ext cx="1569660" cy="369332"/>
+          </a:xfrm>
+          <a:prstGeom prst="rect">
+            <a:avLst/>
+          </a:prstGeom>
+          <a:noFill/>
+        </p:spPr>
+        <p:txBody>
+          <a:bodyPr wrap="none" rtlCol="0">
+            <a:spAutoFit/>
+          </a:bodyPr>
+          <a:lstStyle/>
+          <a:p>
+            <a:r>
+              <a:rPr kumimoji="1" lang="ja-JP" altLang="en-US" b="1"/>
+              <a:t>貿易自由化後</a:t>
+            </a:r>
+          </a:p>
+        </p:txBody>
+      </p:sp>
+      <p:sp>
+        <p:nvSpPr>
+          <p:cNvPr id="8" name="テキスト ボックス 7">
+            <a:extLst>
+              <a:ext uri="{FF2B5EF4-FFF2-40B4-BE49-F238E27FC236}">
+                <a16:creationId xmlns:a16="http://schemas.microsoft.com/office/drawing/2014/main" id="{8EB0195F-A540-A355-04BE-00FE412FCF11}"/>
+              </a:ext>
+            </a:extLst>
+          </p:cNvPr>
+          <p:cNvSpPr txBox="1"/>
+          <p:nvPr/>
+        </p:nvSpPr>
+        <p:spPr>
+          <a:xfrm>
+            <a:off x="9189661" y="1228114"/>
+            <a:ext cx="1569660" cy="369332"/>
+          </a:xfrm>
+          <a:prstGeom prst="rect">
+            <a:avLst/>
+          </a:prstGeom>
+          <a:noFill/>
+        </p:spPr>
+        <p:txBody>
+          <a:bodyPr wrap="none" rtlCol="0">
+            <a:spAutoFit/>
+          </a:bodyPr>
+          <a:lstStyle/>
+          <a:p>
+            <a:r>
+              <a:rPr kumimoji="1" lang="ja-JP" altLang="en-US" b="1"/>
+              <a:t>貿易自由化前</a:t>
+            </a:r>
+          </a:p>
+        </p:txBody>
+      </p:sp>
     </p:spTree>
     <p:extLst>
       <p:ext uri="{BB962C8B-B14F-4D97-AF65-F5344CB8AC3E}">
@@ -7455,7 +8673,7 @@
         <p:spPr/>
         <p:txBody>
           <a:bodyPr>
-            <a:normAutofit/>
+            <a:normAutofit lnSpcReduction="10000"/>
           </a:bodyPr>
           <a:lstStyle/>
           <a:p>
@@ -9089,8 +10307,8 @@
           </a:p>
         </p:txBody>
       </p:sp>
-      <mc:AlternateContent xmlns:mc="http://schemas.openxmlformats.org/markup-compatibility/2006">
-        <mc:Choice xmlns:a14="http://schemas.microsoft.com/office/drawing/2010/main" Requires="a14">
+      <mc:AlternateContent xmlns:mc="http://schemas.openxmlformats.org/markup-compatibility/2006" xmlns:a14="http://schemas.microsoft.com/office/drawing/2010/main">
+        <mc:Choice Requires="a14">
           <p:sp>
             <p:nvSpPr>
               <p:cNvPr id="3" name="Content Placeholder 2">
@@ -9530,7 +10748,7 @@
             </p:txBody>
           </p:sp>
         </mc:Choice>
-        <mc:Fallback>
+        <mc:Fallback xmlns="">
           <p:sp>
             <p:nvSpPr>
               <p:cNvPr id="3" name="Content Placeholder 2">
@@ -16357,7 +17575,7 @@
               <a:t>輸出</a:t>
             </a:r>
             <a:r>
-              <a:rPr lang="ja-JP" altLang="en-US" dirty="0"/>
+              <a:rPr lang="ja-JP" altLang="en-US"/>
               <a:t>を</a:t>
             </a:r>
             <a:r>
@@ -16365,7 +17583,7 @@
               <a:t>行</a:t>
             </a:r>
             <a:r>
-              <a:rPr lang="ja-JP" altLang="en-US" dirty="0"/>
+              <a:rPr lang="ja-JP" altLang="en-US"/>
               <a:t>っている</a:t>
             </a:r>
             <a:r>
@@ -16389,7 +17607,7 @@
               <a:t>)</a:t>
             </a:r>
             <a:r>
-              <a:rPr lang="ja-JP" altLang="en-US" dirty="0"/>
+              <a:rPr lang="ja-JP" altLang="en-US"/>
               <a:t>は</a:t>
             </a:r>
             <a:r>
@@ -16397,7 +17615,7 @@
               <a:t>少数</a:t>
             </a:r>
             <a:r>
-              <a:rPr lang="ja-JP" altLang="en-US" dirty="0"/>
+              <a:rPr lang="ja-JP" altLang="en-US"/>
               <a:t>である。</a:t>
             </a:r>
             <a:endParaRPr lang="en-US" altLang="ja-JP" dirty="0"/>
@@ -16408,7 +17626,7 @@
               <a:buAutoNum type="arabicPeriod"/>
             </a:pPr>
             <a:r>
-              <a:rPr lang="ja-JP" altLang="en-US" dirty="0"/>
+              <a:rPr lang="ja-JP" altLang="en-US"/>
               <a:t>ほんの</a:t>
             </a:r>
             <a:r>
@@ -16416,7 +17634,7 @@
               <a:t>一握</a:t>
             </a:r>
             <a:r>
-              <a:rPr lang="ja-JP" altLang="en-US" dirty="0"/>
+              <a:rPr lang="ja-JP" altLang="en-US"/>
               <a:t>りの</a:t>
             </a:r>
             <a:r>
@@ -16424,7 +17642,7 @@
               <a:t>企業</a:t>
             </a:r>
             <a:r>
-              <a:rPr lang="ja-JP" altLang="en-US" dirty="0"/>
+              <a:rPr lang="ja-JP" altLang="en-US"/>
               <a:t>が</a:t>
             </a:r>
             <a:r>
@@ -16432,7 +17650,7 @@
               <a:t>輸出</a:t>
             </a:r>
             <a:r>
-              <a:rPr lang="ja-JP" altLang="en-US" dirty="0"/>
+              <a:rPr lang="ja-JP" altLang="en-US"/>
               <a:t>の</a:t>
             </a:r>
             <a:r>
@@ -16440,7 +17658,7 @@
               <a:t>大部分</a:t>
             </a:r>
             <a:r>
-              <a:rPr lang="ja-JP" altLang="en-US" dirty="0"/>
+              <a:rPr lang="ja-JP" altLang="en-US"/>
               <a:t>を</a:t>
             </a:r>
             <a:r>
@@ -16448,7 +17666,7 @@
               <a:t>占</a:t>
             </a:r>
             <a:r>
-              <a:rPr lang="ja-JP" altLang="en-US" dirty="0"/>
+              <a:rPr lang="ja-JP" altLang="en-US"/>
               <a:t>めている。</a:t>
             </a:r>
             <a:endParaRPr lang="en-US" altLang="ja-JP" dirty="0"/>
@@ -18247,8 +19465,8 @@
           </a:p>
         </p:txBody>
       </p:sp>
-      <mc:AlternateContent xmlns:mc="http://schemas.openxmlformats.org/markup-compatibility/2006">
-        <mc:Choice xmlns:a14="http://schemas.microsoft.com/office/drawing/2010/main" Requires="a14">
+      <mc:AlternateContent xmlns:mc="http://schemas.openxmlformats.org/markup-compatibility/2006" xmlns:a14="http://schemas.microsoft.com/office/drawing/2010/main">
+        <mc:Choice Requires="a14">
           <p:sp>
             <p:nvSpPr>
               <p:cNvPr id="3" name="Content Placeholder 2">
@@ -18686,7 +19904,7 @@
             </p:txBody>
           </p:sp>
         </mc:Choice>
-        <mc:Fallback>
+        <mc:Fallback xmlns="">
           <p:sp>
             <p:nvSpPr>
               <p:cNvPr id="3" name="Content Placeholder 2">
@@ -18798,6 +20016,108 @@
               <a:xfrm>
                 <a:off x="6884018" y="4316229"/>
                 <a:ext cx="345960" cy="12600"/>
+              </a:xfrm>
+              <a:prstGeom prst="rect">
+                <a:avLst/>
+              </a:prstGeom>
+            </p:spPr>
+          </p:pic>
+        </mc:Fallback>
+      </mc:AlternateContent>
+      <mc:AlternateContent xmlns:mc="http://schemas.openxmlformats.org/markup-compatibility/2006">
+        <mc:Choice xmlns:p14="http://schemas.microsoft.com/office/powerpoint/2010/main" Requires="p14">
+          <p:contentPart p14:bwMode="auto" r:id="rId17">
+            <p14:nvContentPartPr>
+              <p14:cNvPr id="5" name="インク 4">
+                <a:extLst>
+                  <a:ext uri="{FF2B5EF4-FFF2-40B4-BE49-F238E27FC236}">
+                    <a16:creationId xmlns:a16="http://schemas.microsoft.com/office/drawing/2014/main" id="{970EEF74-CEE2-8926-8B81-C5DE30474BC2}"/>
+                  </a:ext>
+                </a:extLst>
+              </p14:cNvPr>
+              <p14:cNvContentPartPr/>
+              <p14:nvPr/>
+            </p14:nvContentPartPr>
+            <p14:xfrm>
+              <a:off x="9540774" y="3309741"/>
+              <a:ext cx="774720" cy="887400"/>
+            </p14:xfrm>
+          </p:contentPart>
+        </mc:Choice>
+        <mc:Fallback>
+          <p:pic>
+            <p:nvPicPr>
+              <p:cNvPr id="5" name="インク 4">
+                <a:extLst>
+                  <a:ext uri="{FF2B5EF4-FFF2-40B4-BE49-F238E27FC236}">
+                    <a16:creationId xmlns:a16="http://schemas.microsoft.com/office/drawing/2014/main" id="{970EEF74-CEE2-8926-8B81-C5DE30474BC2}"/>
+                  </a:ext>
+                </a:extLst>
+              </p:cNvPr>
+              <p:cNvPicPr/>
+              <p:nvPr/>
+            </p:nvPicPr>
+            <p:blipFill>
+              <a:blip r:embed="rId18"/>
+              <a:stretch>
+                <a:fillRect/>
+              </a:stretch>
+            </p:blipFill>
+            <p:spPr>
+              <a:xfrm>
+                <a:off x="9505134" y="3273741"/>
+                <a:ext cx="846360" cy="959040"/>
+              </a:xfrm>
+              <a:prstGeom prst="rect">
+                <a:avLst/>
+              </a:prstGeom>
+            </p:spPr>
+          </p:pic>
+        </mc:Fallback>
+      </mc:AlternateContent>
+      <mc:AlternateContent xmlns:mc="http://schemas.openxmlformats.org/markup-compatibility/2006">
+        <mc:Choice xmlns:p14="http://schemas.microsoft.com/office/powerpoint/2010/main" Requires="p14">
+          <p:contentPart p14:bwMode="auto" r:id="rId19">
+            <p14:nvContentPartPr>
+              <p14:cNvPr id="6" name="インク 5">
+                <a:extLst>
+                  <a:ext uri="{FF2B5EF4-FFF2-40B4-BE49-F238E27FC236}">
+                    <a16:creationId xmlns:a16="http://schemas.microsoft.com/office/drawing/2014/main" id="{07BCF375-CEE6-F81C-5CD1-C14851BE2D63}"/>
+                  </a:ext>
+                </a:extLst>
+              </p14:cNvPr>
+              <p14:cNvContentPartPr/>
+              <p14:nvPr/>
+            </p14:nvContentPartPr>
+            <p14:xfrm>
+              <a:off x="10947294" y="3415581"/>
+              <a:ext cx="778320" cy="839880"/>
+            </p14:xfrm>
+          </p:contentPart>
+        </mc:Choice>
+        <mc:Fallback>
+          <p:pic>
+            <p:nvPicPr>
+              <p:cNvPr id="6" name="インク 5">
+                <a:extLst>
+                  <a:ext uri="{FF2B5EF4-FFF2-40B4-BE49-F238E27FC236}">
+                    <a16:creationId xmlns:a16="http://schemas.microsoft.com/office/drawing/2014/main" id="{07BCF375-CEE6-F81C-5CD1-C14851BE2D63}"/>
+                  </a:ext>
+                </a:extLst>
+              </p:cNvPr>
+              <p:cNvPicPr/>
+              <p:nvPr/>
+            </p:nvPicPr>
+            <p:blipFill>
+              <a:blip r:embed="rId20"/>
+              <a:stretch>
+                <a:fillRect/>
+              </a:stretch>
+            </p:blipFill>
+            <p:spPr>
+              <a:xfrm>
+                <a:off x="10911294" y="3379581"/>
+                <a:ext cx="849960" cy="911520"/>
               </a:xfrm>
               <a:prstGeom prst="rect">
                 <a:avLst/>
@@ -18867,8 +20187,8 @@
           </a:p>
         </p:txBody>
       </p:sp>
-      <mc:AlternateContent xmlns:mc="http://schemas.openxmlformats.org/markup-compatibility/2006">
-        <mc:Choice xmlns:a14="http://schemas.microsoft.com/office/drawing/2010/main" Requires="a14">
+      <mc:AlternateContent xmlns:mc="http://schemas.openxmlformats.org/markup-compatibility/2006" xmlns:a14="http://schemas.microsoft.com/office/drawing/2010/main">
+        <mc:Choice Requires="a14">
           <p:sp>
             <p:nvSpPr>
               <p:cNvPr id="3" name="Content Placeholder 2">
@@ -19289,7 +20609,7 @@
             </p:txBody>
           </p:sp>
         </mc:Choice>
-        <mc:Fallback>
+        <mc:Fallback xmlns="">
           <p:sp>
             <p:nvSpPr>
               <p:cNvPr id="3" name="Content Placeholder 2">
@@ -19358,6 +20678,108 @@
           </a:p>
         </p:txBody>
       </p:sp>
+      <mc:AlternateContent xmlns:mc="http://schemas.openxmlformats.org/markup-compatibility/2006">
+        <mc:Choice xmlns:p14="http://schemas.microsoft.com/office/powerpoint/2010/main" Requires="p14">
+          <p:contentPart p14:bwMode="auto" r:id="rId3">
+            <p14:nvContentPartPr>
+              <p14:cNvPr id="5" name="インク 4">
+                <a:extLst>
+                  <a:ext uri="{FF2B5EF4-FFF2-40B4-BE49-F238E27FC236}">
+                    <a16:creationId xmlns:a16="http://schemas.microsoft.com/office/drawing/2014/main" id="{9933BADC-CBC4-60AB-439A-B66F25B2C73C}"/>
+                  </a:ext>
+                </a:extLst>
+              </p14:cNvPr>
+              <p14:cNvContentPartPr/>
+              <p14:nvPr/>
+            </p14:nvContentPartPr>
+            <p14:xfrm>
+              <a:off x="5906574" y="3141261"/>
+              <a:ext cx="362520" cy="10080"/>
+            </p14:xfrm>
+          </p:contentPart>
+        </mc:Choice>
+        <mc:Fallback>
+          <p:pic>
+            <p:nvPicPr>
+              <p:cNvPr id="5" name="インク 4">
+                <a:extLst>
+                  <a:ext uri="{FF2B5EF4-FFF2-40B4-BE49-F238E27FC236}">
+                    <a16:creationId xmlns:a16="http://schemas.microsoft.com/office/drawing/2014/main" id="{9933BADC-CBC4-60AB-439A-B66F25B2C73C}"/>
+                  </a:ext>
+                </a:extLst>
+              </p:cNvPr>
+              <p:cNvPicPr/>
+              <p:nvPr/>
+            </p:nvPicPr>
+            <p:blipFill>
+              <a:blip r:embed="rId4"/>
+              <a:stretch>
+                <a:fillRect/>
+              </a:stretch>
+            </p:blipFill>
+            <p:spPr>
+              <a:xfrm>
+                <a:off x="5870934" y="3105621"/>
+                <a:ext cx="434160" cy="81720"/>
+              </a:xfrm>
+              <a:prstGeom prst="rect">
+                <a:avLst/>
+              </a:prstGeom>
+            </p:spPr>
+          </p:pic>
+        </mc:Fallback>
+      </mc:AlternateContent>
+      <mc:AlternateContent xmlns:mc="http://schemas.openxmlformats.org/markup-compatibility/2006">
+        <mc:Choice xmlns:p14="http://schemas.microsoft.com/office/powerpoint/2010/main" Requires="p14">
+          <p:contentPart p14:bwMode="auto" r:id="rId5">
+            <p14:nvContentPartPr>
+              <p14:cNvPr id="6" name="インク 5">
+                <a:extLst>
+                  <a:ext uri="{FF2B5EF4-FFF2-40B4-BE49-F238E27FC236}">
+                    <a16:creationId xmlns:a16="http://schemas.microsoft.com/office/drawing/2014/main" id="{7B02E82E-07A4-64F8-CD98-A5EA2A3B93F1}"/>
+                  </a:ext>
+                </a:extLst>
+              </p14:cNvPr>
+              <p14:cNvContentPartPr/>
+              <p14:nvPr/>
+            </p14:nvContentPartPr>
+            <p14:xfrm>
+              <a:off x="2651814" y="5656581"/>
+              <a:ext cx="1665000" cy="29160"/>
+            </p14:xfrm>
+          </p:contentPart>
+        </mc:Choice>
+        <mc:Fallback>
+          <p:pic>
+            <p:nvPicPr>
+              <p:cNvPr id="6" name="インク 5">
+                <a:extLst>
+                  <a:ext uri="{FF2B5EF4-FFF2-40B4-BE49-F238E27FC236}">
+                    <a16:creationId xmlns:a16="http://schemas.microsoft.com/office/drawing/2014/main" id="{7B02E82E-07A4-64F8-CD98-A5EA2A3B93F1}"/>
+                  </a:ext>
+                </a:extLst>
+              </p:cNvPr>
+              <p:cNvPicPr/>
+              <p:nvPr/>
+            </p:nvPicPr>
+            <p:blipFill>
+              <a:blip r:embed="rId6"/>
+              <a:stretch>
+                <a:fillRect/>
+              </a:stretch>
+            </p:blipFill>
+            <p:spPr>
+              <a:xfrm>
+                <a:off x="2616174" y="5620581"/>
+                <a:ext cx="1736640" cy="100800"/>
+              </a:xfrm>
+              <a:prstGeom prst="rect">
+                <a:avLst/>
+              </a:prstGeom>
+            </p:spPr>
+          </p:pic>
+        </mc:Fallback>
+      </mc:AlternateContent>
     </p:spTree>
     <p:extLst>
       <p:ext uri="{BB962C8B-B14F-4D97-AF65-F5344CB8AC3E}">
